--- a/docs/Bellora.pptx
+++ b/docs/Bellora.pptx
@@ -5,14 +5,17 @@
     <p:sldMasterId id="2147483648" r:id="rId1"/>
   </p:sldMasterIdLst>
   <p:notesMasterIdLst>
-    <p:notesMasterId r:id="rId7"/>
+    <p:notesMasterId r:id="rId10"/>
   </p:notesMasterIdLst>
   <p:sldIdLst>
     <p:sldId id="256" r:id="rId2"/>
-    <p:sldId id="257" r:id="rId3"/>
-    <p:sldId id="259" r:id="rId4"/>
-    <p:sldId id="261" r:id="rId5"/>
-    <p:sldId id="262" r:id="rId6"/>
+    <p:sldId id="265" r:id="rId3"/>
+    <p:sldId id="257" r:id="rId4"/>
+    <p:sldId id="263" r:id="rId5"/>
+    <p:sldId id="264" r:id="rId6"/>
+    <p:sldId id="259" r:id="rId7"/>
+    <p:sldId id="261" r:id="rId8"/>
+    <p:sldId id="262" r:id="rId9"/>
   </p:sldIdLst>
   <p:sldSz cx="12192000" cy="6858000"/>
   <p:notesSz cx="6858000" cy="9144000"/>
@@ -111,6 +114,11 @@
       </a:defRPr>
     </a:lvl9pPr>
   </p:defaultTextStyle>
+  <p:extLst>
+    <p:ext uri="{EFAFB233-063F-42B5-8137-9DF3F51BA10A}">
+      <p15:sldGuideLst xmlns:p15="http://schemas.microsoft.com/office/powerpoint/2012/main"/>
+    </p:ext>
+  </p:extLst>
 </p:presentation>
 </file>
 
@@ -196,7 +204,7 @@
           <a:p>
             <a:fld id="{7368D833-244B-4ADB-AE91-8A49E86CB26D}" type="datetimeFigureOut">
               <a:rPr lang="hu-HU" smtClean="0"/>
-              <a:t>2026. 04. 20.</a:t>
+              <a:t>2026. 04. 21.</a:t>
             </a:fld>
             <a:endParaRPr lang="hu-HU"/>
           </a:p>
@@ -540,7 +548,7 @@
           <a:p>
             <a:fld id="{ECDF967C-C838-4F8F-BC28-F2B7B353D3AD}" type="slidenum">
               <a:rPr lang="hu-HU" smtClean="0"/>
-              <a:t>5</a:t>
+              <a:t>8</a:t>
             </a:fld>
             <a:endParaRPr lang="hu-HU"/>
           </a:p>
@@ -706,7 +714,7 @@
           <a:p>
             <a:fld id="{AA4C53F9-DAF1-4795-BE70-D200669F1F02}" type="datetimeFigureOut">
               <a:rPr lang="hu-HU" smtClean="0"/>
-              <a:t>2026. 04. 20.</a:t>
+              <a:t>2026. 04. 21.</a:t>
             </a:fld>
             <a:endParaRPr lang="hu-HU"/>
           </a:p>
@@ -904,7 +912,7 @@
           <a:p>
             <a:fld id="{AA4C53F9-DAF1-4795-BE70-D200669F1F02}" type="datetimeFigureOut">
               <a:rPr lang="hu-HU" smtClean="0"/>
-              <a:t>2026. 04. 20.</a:t>
+              <a:t>2026. 04. 21.</a:t>
             </a:fld>
             <a:endParaRPr lang="hu-HU"/>
           </a:p>
@@ -1112,7 +1120,7 @@
           <a:p>
             <a:fld id="{AA4C53F9-DAF1-4795-BE70-D200669F1F02}" type="datetimeFigureOut">
               <a:rPr lang="hu-HU" smtClean="0"/>
-              <a:t>2026. 04. 20.</a:t>
+              <a:t>2026. 04. 21.</a:t>
             </a:fld>
             <a:endParaRPr lang="hu-HU"/>
           </a:p>
@@ -1310,7 +1318,7 @@
           <a:p>
             <a:fld id="{AA4C53F9-DAF1-4795-BE70-D200669F1F02}" type="datetimeFigureOut">
               <a:rPr lang="hu-HU" smtClean="0"/>
-              <a:t>2026. 04. 20.</a:t>
+              <a:t>2026. 04. 21.</a:t>
             </a:fld>
             <a:endParaRPr lang="hu-HU"/>
           </a:p>
@@ -1588,7 +1596,7 @@
           <a:p>
             <a:fld id="{AA4C53F9-DAF1-4795-BE70-D200669F1F02}" type="datetimeFigureOut">
               <a:rPr lang="hu-HU" smtClean="0"/>
-              <a:t>2026. 04. 20.</a:t>
+              <a:t>2026. 04. 21.</a:t>
             </a:fld>
             <a:endParaRPr lang="hu-HU"/>
           </a:p>
@@ -1853,7 +1861,7 @@
           <a:p>
             <a:fld id="{AA4C53F9-DAF1-4795-BE70-D200669F1F02}" type="datetimeFigureOut">
               <a:rPr lang="hu-HU" smtClean="0"/>
-              <a:t>2026. 04. 20.</a:t>
+              <a:t>2026. 04. 21.</a:t>
             </a:fld>
             <a:endParaRPr lang="hu-HU"/>
           </a:p>
@@ -2265,7 +2273,7 @@
           <a:p>
             <a:fld id="{AA4C53F9-DAF1-4795-BE70-D200669F1F02}" type="datetimeFigureOut">
               <a:rPr lang="hu-HU" smtClean="0"/>
-              <a:t>2026. 04. 20.</a:t>
+              <a:t>2026. 04. 21.</a:t>
             </a:fld>
             <a:endParaRPr lang="hu-HU"/>
           </a:p>
@@ -2406,7 +2414,7 @@
           <a:p>
             <a:fld id="{AA4C53F9-DAF1-4795-BE70-D200669F1F02}" type="datetimeFigureOut">
               <a:rPr lang="hu-HU" smtClean="0"/>
-              <a:t>2026. 04. 20.</a:t>
+              <a:t>2026. 04. 21.</a:t>
             </a:fld>
             <a:endParaRPr lang="hu-HU"/>
           </a:p>
@@ -2519,7 +2527,7 @@
           <a:p>
             <a:fld id="{AA4C53F9-DAF1-4795-BE70-D200669F1F02}" type="datetimeFigureOut">
               <a:rPr lang="hu-HU" smtClean="0"/>
-              <a:t>2026. 04. 20.</a:t>
+              <a:t>2026. 04. 21.</a:t>
             </a:fld>
             <a:endParaRPr lang="hu-HU"/>
           </a:p>
@@ -2830,7 +2838,7 @@
           <a:p>
             <a:fld id="{AA4C53F9-DAF1-4795-BE70-D200669F1F02}" type="datetimeFigureOut">
               <a:rPr lang="hu-HU" smtClean="0"/>
-              <a:t>2026. 04. 20.</a:t>
+              <a:t>2026. 04. 21.</a:t>
             </a:fld>
             <a:endParaRPr lang="hu-HU"/>
           </a:p>
@@ -3118,7 +3126,7 @@
           <a:p>
             <a:fld id="{AA4C53F9-DAF1-4795-BE70-D200669F1F02}" type="datetimeFigureOut">
               <a:rPr lang="hu-HU" smtClean="0"/>
-              <a:t>2026. 04. 20.</a:t>
+              <a:t>2026. 04. 21.</a:t>
             </a:fld>
             <a:endParaRPr lang="hu-HU"/>
           </a:p>
@@ -3265,7 +3273,7 @@
           <a:lstStyle/>
           <a:p>
             <a:r>
-              <a:rPr lang="hu-HU"/>
+              <a:rPr lang="hu-HU" dirty="0"/>
               <a:t>Mintacím szerkesztése</a:t>
             </a:r>
           </a:p>
@@ -3304,35 +3312,35 @@
           <a:p>
             <a:pPr lvl="0"/>
             <a:r>
-              <a:rPr lang="hu-HU"/>
+              <a:rPr lang="hu-HU" dirty="0"/>
               <a:t>Mintaszöveg szerkesztése</a:t>
             </a:r>
           </a:p>
           <a:p>
             <a:pPr lvl="1"/>
             <a:r>
-              <a:rPr lang="hu-HU"/>
+              <a:rPr lang="hu-HU" dirty="0"/>
               <a:t>Második szint</a:t>
             </a:r>
           </a:p>
           <a:p>
             <a:pPr lvl="2"/>
             <a:r>
-              <a:rPr lang="hu-HU"/>
+              <a:rPr lang="hu-HU" dirty="0"/>
               <a:t>Harmadik szint</a:t>
             </a:r>
           </a:p>
           <a:p>
             <a:pPr lvl="3"/>
             <a:r>
-              <a:rPr lang="hu-HU"/>
+              <a:rPr lang="hu-HU" dirty="0"/>
               <a:t>Negyedik szint</a:t>
             </a:r>
           </a:p>
           <a:p>
             <a:pPr lvl="4"/>
             <a:r>
-              <a:rPr lang="hu-HU"/>
+              <a:rPr lang="hu-HU" dirty="0"/>
               <a:t>Ötödik szint</a:t>
             </a:r>
           </a:p>
@@ -3379,7 +3387,7 @@
           <a:p>
             <a:fld id="{AA4C53F9-DAF1-4795-BE70-D200669F1F02}" type="datetimeFigureOut">
               <a:rPr lang="hu-HU" smtClean="0"/>
-              <a:t>2026. 04. 20.</a:t>
+              <a:t>2026. 04. 21.</a:t>
             </a:fld>
             <a:endParaRPr lang="hu-HU"/>
           </a:p>
@@ -3508,7 +3516,7 @@
         <a:buNone/>
         <a:defRPr sz="4400" kern="1200">
           <a:solidFill>
-            <a:schemeClr val="tx1"/>
+            <a:schemeClr val="bg1"/>
           </a:solidFill>
           <a:latin typeface="+mj-lt"/>
           <a:ea typeface="+mj-ea"/>
@@ -3528,7 +3536,7 @@
         <a:buChar char="•"/>
         <a:defRPr sz="2800" kern="1200">
           <a:solidFill>
-            <a:schemeClr val="tx1"/>
+            <a:schemeClr val="bg1"/>
           </a:solidFill>
           <a:latin typeface="+mn-lt"/>
           <a:ea typeface="+mn-ea"/>
@@ -3546,7 +3554,7 @@
         <a:buChar char="•"/>
         <a:defRPr sz="2400" kern="1200">
           <a:solidFill>
-            <a:schemeClr val="tx1"/>
+            <a:schemeClr val="bg1"/>
           </a:solidFill>
           <a:latin typeface="+mn-lt"/>
           <a:ea typeface="+mn-ea"/>
@@ -3564,7 +3572,7 @@
         <a:buChar char="•"/>
         <a:defRPr sz="2000" kern="1200">
           <a:solidFill>
-            <a:schemeClr val="tx1"/>
+            <a:schemeClr val="bg1"/>
           </a:solidFill>
           <a:latin typeface="+mn-lt"/>
           <a:ea typeface="+mn-ea"/>
@@ -3582,7 +3590,7 @@
         <a:buChar char="•"/>
         <a:defRPr sz="1800" kern="1200">
           <a:solidFill>
-            <a:schemeClr val="tx1"/>
+            <a:schemeClr val="bg1"/>
           </a:solidFill>
           <a:latin typeface="+mn-lt"/>
           <a:ea typeface="+mn-ea"/>
@@ -3600,7 +3608,7 @@
         <a:buChar char="•"/>
         <a:defRPr sz="1800" kern="1200">
           <a:solidFill>
-            <a:schemeClr val="tx1"/>
+            <a:schemeClr val="bg1"/>
           </a:solidFill>
           <a:latin typeface="+mn-lt"/>
           <a:ea typeface="+mn-ea"/>
@@ -3892,6 +3900,171 @@
           <p:cNvPr id="2" name="Cím 1">
             <a:extLst>
               <a:ext uri="{FF2B5EF4-FFF2-40B4-BE49-F238E27FC236}">
+                <a16:creationId xmlns:a16="http://schemas.microsoft.com/office/drawing/2014/main" id="{57E022A7-4CC2-C02D-3423-B45E937A2E07}"/>
+              </a:ext>
+            </a:extLst>
+          </p:cNvPr>
+          <p:cNvSpPr>
+            <a:spLocks noGrp="1"/>
+          </p:cNvSpPr>
+          <p:nvPr>
+            <p:ph type="title"/>
+          </p:nvPr>
+        </p:nvSpPr>
+        <p:spPr/>
+        <p:txBody>
+          <a:bodyPr/>
+          <a:lstStyle/>
+          <a:p>
+            <a:r>
+              <a:rPr lang="hu-HU" dirty="0" err="1"/>
+              <a:t>Table</a:t>
+            </a:r>
+            <a:r>
+              <a:rPr lang="hu-HU" dirty="0"/>
+              <a:t> of </a:t>
+            </a:r>
+            <a:r>
+              <a:rPr lang="hu-HU" dirty="0" err="1"/>
+              <a:t>contents</a:t>
+            </a:r>
+            <a:endParaRPr lang="hu-HU" dirty="0"/>
+          </a:p>
+        </p:txBody>
+      </p:sp>
+      <p:sp>
+        <p:nvSpPr>
+          <p:cNvPr id="3" name="Tartalom helye 2">
+            <a:extLst>
+              <a:ext uri="{FF2B5EF4-FFF2-40B4-BE49-F238E27FC236}">
+                <a16:creationId xmlns:a16="http://schemas.microsoft.com/office/drawing/2014/main" id="{EE3BA33F-2B90-AC89-DA26-15C1678A2A9B}"/>
+              </a:ext>
+            </a:extLst>
+          </p:cNvPr>
+          <p:cNvSpPr>
+            <a:spLocks noGrp="1"/>
+          </p:cNvSpPr>
+          <p:nvPr>
+            <p:ph idx="1"/>
+          </p:nvPr>
+        </p:nvSpPr>
+        <p:spPr/>
+        <p:txBody>
+          <a:bodyPr/>
+          <a:lstStyle/>
+          <a:p>
+            <a:r>
+              <a:rPr lang="hu-HU" dirty="0" err="1"/>
+              <a:t>Purpose</a:t>
+            </a:r>
+            <a:r>
+              <a:rPr lang="hu-HU" dirty="0"/>
+              <a:t> of </a:t>
+            </a:r>
+            <a:r>
+              <a:rPr lang="hu-HU" dirty="0" err="1"/>
+              <a:t>the</a:t>
+            </a:r>
+            <a:r>
+              <a:rPr lang="hu-HU" dirty="0"/>
+              <a:t> Software</a:t>
+            </a:r>
+          </a:p>
+          <a:p>
+            <a:r>
+              <a:rPr lang="hu-HU" dirty="0"/>
+              <a:t>Project </a:t>
+            </a:r>
+            <a:r>
+              <a:rPr lang="hu-HU" dirty="0" err="1"/>
+              <a:t>setup</a:t>
+            </a:r>
+            <a:endParaRPr lang="hu-HU" dirty="0"/>
+          </a:p>
+          <a:p>
+            <a:r>
+              <a:rPr lang="hu-HU" dirty="0"/>
+              <a:t>Project management </a:t>
+            </a:r>
+            <a:r>
+              <a:rPr lang="hu-HU" dirty="0" err="1"/>
+              <a:t>tools</a:t>
+            </a:r>
+            <a:endParaRPr lang="hu-HU" dirty="0"/>
+          </a:p>
+          <a:p>
+            <a:r>
+              <a:rPr lang="hu-HU" dirty="0" err="1"/>
+              <a:t>Csák’s</a:t>
+            </a:r>
+            <a:r>
+              <a:rPr lang="hu-HU" dirty="0"/>
+              <a:t> </a:t>
+            </a:r>
+            <a:r>
+              <a:rPr lang="hu-HU" dirty="0" err="1"/>
+              <a:t>contributions</a:t>
+            </a:r>
+            <a:endParaRPr lang="hu-HU" dirty="0"/>
+          </a:p>
+          <a:p>
+            <a:r>
+              <a:rPr lang="hu-HU" dirty="0" err="1"/>
+              <a:t>Gere’s</a:t>
+            </a:r>
+            <a:r>
+              <a:rPr lang="hu-HU" dirty="0"/>
+              <a:t> </a:t>
+            </a:r>
+            <a:r>
+              <a:rPr lang="hu-HU" dirty="0" err="1"/>
+              <a:t>contributions</a:t>
+            </a:r>
+            <a:endParaRPr lang="hu-HU" dirty="0"/>
+          </a:p>
+          <a:p>
+            <a:endParaRPr lang="hu-HU" dirty="0"/>
+          </a:p>
+        </p:txBody>
+      </p:sp>
+    </p:spTree>
+    <p:extLst>
+      <p:ext uri="{BB962C8B-B14F-4D97-AF65-F5344CB8AC3E}">
+        <p14:creationId xmlns:p14="http://schemas.microsoft.com/office/powerpoint/2010/main" val="1536073863"/>
+      </p:ext>
+    </p:extLst>
+  </p:cSld>
+  <p:clrMapOvr>
+    <a:masterClrMapping/>
+  </p:clrMapOvr>
+  <p:transition spd="slow">
+    <p:push dir="u"/>
+  </p:transition>
+</p:sld>
+</file>
+
+<file path=ppt/slides/slide3.xml><?xml version="1.0" encoding="utf-8"?>
+<p:sld xmlns:a="http://schemas.openxmlformats.org/drawingml/2006/main" xmlns:r="http://schemas.openxmlformats.org/officeDocument/2006/relationships" xmlns:p="http://schemas.openxmlformats.org/presentationml/2006/main">
+  <p:cSld>
+    <p:spTree>
+      <p:nvGrpSpPr>
+        <p:cNvPr id="1" name=""/>
+        <p:cNvGrpSpPr/>
+        <p:nvPr/>
+      </p:nvGrpSpPr>
+      <p:grpSpPr>
+        <a:xfrm>
+          <a:off x="0" y="0"/>
+          <a:ext cx="0" cy="0"/>
+          <a:chOff x="0" y="0"/>
+          <a:chExt cx="0" cy="0"/>
+        </a:xfrm>
+      </p:grpSpPr>
+      <p:sp>
+        <p:nvSpPr>
+          <p:cNvPr id="2" name="Cím 1">
+            <a:extLst>
+              <a:ext uri="{FF2B5EF4-FFF2-40B4-BE49-F238E27FC236}">
                 <a16:creationId xmlns:a16="http://schemas.microsoft.com/office/drawing/2014/main" id="{4376D53B-F8D4-57A9-0E67-F7F2EE77A45F}"/>
               </a:ext>
             </a:extLst>
@@ -4280,58 +4453,110 @@
           </a:lstStyle>
           <a:p>
             <a:r>
-              <a:rPr lang="en-US" dirty="0"/>
+              <a:rPr lang="en-US" dirty="0">
+                <a:solidFill>
+                  <a:schemeClr val="bg1"/>
+                </a:solidFill>
+              </a:rPr>
               <a:t>Innovative Web Platform:</a:t>
             </a:r>
           </a:p>
           <a:p>
             <a:pPr lvl="1" algn="just"/>
             <a:r>
-              <a:rPr lang="en-US" dirty="0"/>
+              <a:rPr lang="en-US" dirty="0">
+                <a:solidFill>
+                  <a:schemeClr val="bg1"/>
+                </a:solidFill>
+              </a:rPr>
               <a:t>Accessible on both </a:t>
             </a:r>
             <a:r>
-              <a:rPr lang="en-US" b="1" dirty="0"/>
+              <a:rPr lang="en-US" b="1" dirty="0">
+                <a:solidFill>
+                  <a:schemeClr val="bg1"/>
+                </a:solidFill>
+              </a:rPr>
               <a:t>mobile devices</a:t>
             </a:r>
             <a:r>
-              <a:rPr lang="en-US" dirty="0"/>
+              <a:rPr lang="en-US" dirty="0">
+                <a:solidFill>
+                  <a:schemeClr val="bg1"/>
+                </a:solidFill>
+              </a:rPr>
               <a:t> and </a:t>
             </a:r>
             <a:r>
-              <a:rPr lang="en-US" b="1" dirty="0"/>
+              <a:rPr lang="en-US" b="1" dirty="0">
+                <a:solidFill>
+                  <a:schemeClr val="bg1"/>
+                </a:solidFill>
+              </a:rPr>
               <a:t>computers</a:t>
             </a:r>
             <a:r>
-              <a:rPr lang="hu-HU" b="1" dirty="0"/>
+              <a:rPr lang="hu-HU" b="1" dirty="0">
+                <a:solidFill>
+                  <a:schemeClr val="bg1"/>
+                </a:solidFill>
+              </a:rPr>
               <a:t> </a:t>
             </a:r>
             <a:r>
-              <a:rPr lang="hu-HU" dirty="0"/>
+              <a:rPr lang="hu-HU" dirty="0">
+                <a:solidFill>
+                  <a:schemeClr val="bg1"/>
+                </a:solidFill>
+              </a:rPr>
               <a:t>(</a:t>
             </a:r>
             <a:r>
-              <a:rPr lang="hu-HU" dirty="0" err="1"/>
+              <a:rPr lang="hu-HU" dirty="0" err="1">
+                <a:solidFill>
+                  <a:schemeClr val="bg1"/>
+                </a:solidFill>
+              </a:rPr>
               <a:t>responsive</a:t>
             </a:r>
             <a:r>
-              <a:rPr lang="hu-HU" dirty="0"/>
+              <a:rPr lang="hu-HU" dirty="0">
+                <a:solidFill>
+                  <a:schemeClr val="bg1"/>
+                </a:solidFill>
+              </a:rPr>
               <a:t> design)</a:t>
             </a:r>
-            <a:endParaRPr lang="en-US" dirty="0"/>
+            <a:endParaRPr lang="en-US" dirty="0">
+              <a:solidFill>
+                <a:schemeClr val="bg1"/>
+              </a:solidFill>
+            </a:endParaRPr>
           </a:p>
           <a:p>
             <a:pPr lvl="1" algn="just"/>
             <a:r>
-              <a:rPr lang="en-US" dirty="0"/>
+              <a:rPr lang="en-US" dirty="0">
+                <a:solidFill>
+                  <a:schemeClr val="bg1"/>
+                </a:solidFill>
+              </a:rPr>
               <a:t>Ensures </a:t>
             </a:r>
             <a:r>
-              <a:rPr lang="en-US" b="1" dirty="0"/>
+              <a:rPr lang="en-US" b="1" dirty="0">
+                <a:solidFill>
+                  <a:schemeClr val="bg1"/>
+                </a:solidFill>
+              </a:rPr>
               <a:t>broad usability </a:t>
             </a:r>
             <a:r>
-              <a:rPr lang="en-US" dirty="0"/>
+              <a:rPr lang="en-US" dirty="0">
+                <a:solidFill>
+                  <a:schemeClr val="bg1"/>
+                </a:solidFill>
+              </a:rPr>
               <a:t>and convenience</a:t>
             </a:r>
           </a:p>
@@ -4356,7 +4581,1578 @@
 </p:sld>
 </file>
 
-<file path=ppt/slides/slide3.xml><?xml version="1.0" encoding="utf-8"?>
+<file path=ppt/slides/slide4.xml><?xml version="1.0" encoding="utf-8"?>
+<p:sld xmlns:a="http://schemas.openxmlformats.org/drawingml/2006/main" xmlns:r="http://schemas.openxmlformats.org/officeDocument/2006/relationships" xmlns:p="http://schemas.openxmlformats.org/presentationml/2006/main">
+  <p:cSld>
+    <p:spTree>
+      <p:nvGrpSpPr>
+        <p:cNvPr id="1" name=""/>
+        <p:cNvGrpSpPr/>
+        <p:nvPr/>
+      </p:nvGrpSpPr>
+      <p:grpSpPr>
+        <a:xfrm>
+          <a:off x="0" y="0"/>
+          <a:ext cx="0" cy="0"/>
+          <a:chOff x="0" y="0"/>
+          <a:chExt cx="0" cy="0"/>
+        </a:xfrm>
+      </p:grpSpPr>
+      <p:sp>
+        <p:nvSpPr>
+          <p:cNvPr id="2" name="Cím 1">
+            <a:extLst>
+              <a:ext uri="{FF2B5EF4-FFF2-40B4-BE49-F238E27FC236}">
+                <a16:creationId xmlns:a16="http://schemas.microsoft.com/office/drawing/2014/main" id="{34268B84-6087-CA78-AC4F-27E3B0E8BE43}"/>
+              </a:ext>
+            </a:extLst>
+          </p:cNvPr>
+          <p:cNvSpPr>
+            <a:spLocks noGrp="1"/>
+          </p:cNvSpPr>
+          <p:nvPr>
+            <p:ph type="title"/>
+          </p:nvPr>
+        </p:nvSpPr>
+        <p:spPr/>
+        <p:txBody>
+          <a:bodyPr/>
+          <a:lstStyle/>
+          <a:p>
+            <a:r>
+              <a:rPr lang="hu-HU" dirty="0"/>
+              <a:t>Project </a:t>
+            </a:r>
+            <a:r>
+              <a:rPr lang="hu-HU" dirty="0" err="1"/>
+              <a:t>setup</a:t>
+            </a:r>
+            <a:endParaRPr lang="hu-HU" dirty="0"/>
+          </a:p>
+        </p:txBody>
+      </p:sp>
+      <p:sp>
+        <p:nvSpPr>
+          <p:cNvPr id="3" name="Tartalom helye 2">
+            <a:extLst>
+              <a:ext uri="{FF2B5EF4-FFF2-40B4-BE49-F238E27FC236}">
+                <a16:creationId xmlns:a16="http://schemas.microsoft.com/office/drawing/2014/main" id="{75DF0F03-B92D-2A91-4209-874562483C60}"/>
+              </a:ext>
+            </a:extLst>
+          </p:cNvPr>
+          <p:cNvSpPr>
+            <a:spLocks noGrp="1"/>
+          </p:cNvSpPr>
+          <p:nvPr>
+            <p:ph idx="1"/>
+          </p:nvPr>
+        </p:nvSpPr>
+        <p:spPr>
+          <a:xfrm>
+            <a:off x="838200" y="1825625"/>
+            <a:ext cx="5257800" cy="2165350"/>
+          </a:xfrm>
+        </p:spPr>
+        <p:txBody>
+          <a:bodyPr/>
+          <a:lstStyle/>
+          <a:p>
+            <a:pPr marL="0" indent="0" algn="ctr">
+              <a:buNone/>
+            </a:pPr>
+            <a:r>
+              <a:rPr lang="hu-HU" dirty="0"/>
+              <a:t>Frontend</a:t>
+            </a:r>
+          </a:p>
+          <a:p>
+            <a:pPr algn="ctr"/>
+            <a:r>
+              <a:rPr lang="hu-HU" sz="2000" dirty="0"/>
+              <a:t>React.js</a:t>
+            </a:r>
+          </a:p>
+          <a:p>
+            <a:pPr algn="ctr"/>
+            <a:r>
+              <a:rPr lang="hu-HU" sz="2000" dirty="0" err="1"/>
+              <a:t>Tailwind</a:t>
+            </a:r>
+            <a:endParaRPr lang="hu-HU" sz="2000" dirty="0"/>
+          </a:p>
+          <a:p>
+            <a:pPr algn="ctr"/>
+            <a:r>
+              <a:rPr lang="hu-HU" sz="2000" dirty="0" err="1"/>
+              <a:t>Axios</a:t>
+            </a:r>
+            <a:endParaRPr lang="hu-HU" sz="2000" dirty="0"/>
+          </a:p>
+          <a:p>
+            <a:pPr algn="ctr"/>
+            <a:r>
+              <a:rPr lang="hu-HU" sz="2000" dirty="0"/>
+              <a:t>Socket.io-</a:t>
+            </a:r>
+            <a:r>
+              <a:rPr lang="hu-HU" sz="2000" dirty="0" err="1"/>
+              <a:t>client</a:t>
+            </a:r>
+            <a:endParaRPr lang="hu-HU" sz="2000" dirty="0"/>
+          </a:p>
+        </p:txBody>
+      </p:sp>
+      <p:sp>
+        <p:nvSpPr>
+          <p:cNvPr id="7" name="Tartalom helye 2">
+            <a:extLst>
+              <a:ext uri="{FF2B5EF4-FFF2-40B4-BE49-F238E27FC236}">
+                <a16:creationId xmlns:a16="http://schemas.microsoft.com/office/drawing/2014/main" id="{AF339112-A58D-2AC6-31FA-35EDC0E7D256}"/>
+              </a:ext>
+            </a:extLst>
+          </p:cNvPr>
+          <p:cNvSpPr txBox="1">
+            <a:spLocks/>
+          </p:cNvSpPr>
+          <p:nvPr/>
+        </p:nvSpPr>
+        <p:spPr>
+          <a:xfrm>
+            <a:off x="838200" y="4219575"/>
+            <a:ext cx="5257800" cy="2165350"/>
+          </a:xfrm>
+          <a:prstGeom prst="rect">
+            <a:avLst/>
+          </a:prstGeom>
+        </p:spPr>
+        <p:txBody>
+          <a:bodyPr vert="horz" lIns="91440" tIns="45720" rIns="91440" bIns="45720" rtlCol="0">
+            <a:normAutofit/>
+          </a:bodyPr>
+          <a:lstStyle>
+            <a:lvl1pPr marL="228600" indent="-228600" algn="l" defTabSz="914400" rtl="0" eaLnBrk="1" latinLnBrk="0" hangingPunct="1">
+              <a:lnSpc>
+                <a:spcPct val="90000"/>
+              </a:lnSpc>
+              <a:spcBef>
+                <a:spcPts val="1000"/>
+              </a:spcBef>
+              <a:buFont typeface="Arial" panose="020B0604020202020204" pitchFamily="34" charset="0"/>
+              <a:buChar char="•"/>
+              <a:defRPr sz="2800" kern="1200">
+                <a:solidFill>
+                  <a:schemeClr val="bg1"/>
+                </a:solidFill>
+                <a:latin typeface="+mn-lt"/>
+                <a:ea typeface="+mn-ea"/>
+                <a:cs typeface="+mn-cs"/>
+              </a:defRPr>
+            </a:lvl1pPr>
+            <a:lvl2pPr marL="685800" indent="-228600" algn="l" defTabSz="914400" rtl="0" eaLnBrk="1" latinLnBrk="0" hangingPunct="1">
+              <a:lnSpc>
+                <a:spcPct val="90000"/>
+              </a:lnSpc>
+              <a:spcBef>
+                <a:spcPts val="500"/>
+              </a:spcBef>
+              <a:buFont typeface="Arial" panose="020B0604020202020204" pitchFamily="34" charset="0"/>
+              <a:buChar char="•"/>
+              <a:defRPr sz="2400" kern="1200">
+                <a:solidFill>
+                  <a:schemeClr val="bg1"/>
+                </a:solidFill>
+                <a:latin typeface="+mn-lt"/>
+                <a:ea typeface="+mn-ea"/>
+                <a:cs typeface="+mn-cs"/>
+              </a:defRPr>
+            </a:lvl2pPr>
+            <a:lvl3pPr marL="1143000" indent="-228600" algn="l" defTabSz="914400" rtl="0" eaLnBrk="1" latinLnBrk="0" hangingPunct="1">
+              <a:lnSpc>
+                <a:spcPct val="90000"/>
+              </a:lnSpc>
+              <a:spcBef>
+                <a:spcPts val="500"/>
+              </a:spcBef>
+              <a:buFont typeface="Arial" panose="020B0604020202020204" pitchFamily="34" charset="0"/>
+              <a:buChar char="•"/>
+              <a:defRPr sz="2000" kern="1200">
+                <a:solidFill>
+                  <a:schemeClr val="bg1"/>
+                </a:solidFill>
+                <a:latin typeface="+mn-lt"/>
+                <a:ea typeface="+mn-ea"/>
+                <a:cs typeface="+mn-cs"/>
+              </a:defRPr>
+            </a:lvl3pPr>
+            <a:lvl4pPr marL="1600200" indent="-228600" algn="l" defTabSz="914400" rtl="0" eaLnBrk="1" latinLnBrk="0" hangingPunct="1">
+              <a:lnSpc>
+                <a:spcPct val="90000"/>
+              </a:lnSpc>
+              <a:spcBef>
+                <a:spcPts val="500"/>
+              </a:spcBef>
+              <a:buFont typeface="Arial" panose="020B0604020202020204" pitchFamily="34" charset="0"/>
+              <a:buChar char="•"/>
+              <a:defRPr sz="1800" kern="1200">
+                <a:solidFill>
+                  <a:schemeClr val="bg1"/>
+                </a:solidFill>
+                <a:latin typeface="+mn-lt"/>
+                <a:ea typeface="+mn-ea"/>
+                <a:cs typeface="+mn-cs"/>
+              </a:defRPr>
+            </a:lvl4pPr>
+            <a:lvl5pPr marL="2057400" indent="-228600" algn="l" defTabSz="914400" rtl="0" eaLnBrk="1" latinLnBrk="0" hangingPunct="1">
+              <a:lnSpc>
+                <a:spcPct val="90000"/>
+              </a:lnSpc>
+              <a:spcBef>
+                <a:spcPts val="500"/>
+              </a:spcBef>
+              <a:buFont typeface="Arial" panose="020B0604020202020204" pitchFamily="34" charset="0"/>
+              <a:buChar char="•"/>
+              <a:defRPr sz="1800" kern="1200">
+                <a:solidFill>
+                  <a:schemeClr val="bg1"/>
+                </a:solidFill>
+                <a:latin typeface="+mn-lt"/>
+                <a:ea typeface="+mn-ea"/>
+                <a:cs typeface="+mn-cs"/>
+              </a:defRPr>
+            </a:lvl5pPr>
+            <a:lvl6pPr marL="2514600" indent="-228600" algn="l" defTabSz="914400" rtl="0" eaLnBrk="1" latinLnBrk="0" hangingPunct="1">
+              <a:lnSpc>
+                <a:spcPct val="90000"/>
+              </a:lnSpc>
+              <a:spcBef>
+                <a:spcPts val="500"/>
+              </a:spcBef>
+              <a:buFont typeface="Arial" panose="020B0604020202020204" pitchFamily="34" charset="0"/>
+              <a:buChar char="•"/>
+              <a:defRPr sz="1800" kern="1200">
+                <a:solidFill>
+                  <a:schemeClr val="tx1"/>
+                </a:solidFill>
+                <a:latin typeface="+mn-lt"/>
+                <a:ea typeface="+mn-ea"/>
+                <a:cs typeface="+mn-cs"/>
+              </a:defRPr>
+            </a:lvl6pPr>
+            <a:lvl7pPr marL="2971800" indent="-228600" algn="l" defTabSz="914400" rtl="0" eaLnBrk="1" latinLnBrk="0" hangingPunct="1">
+              <a:lnSpc>
+                <a:spcPct val="90000"/>
+              </a:lnSpc>
+              <a:spcBef>
+                <a:spcPts val="500"/>
+              </a:spcBef>
+              <a:buFont typeface="Arial" panose="020B0604020202020204" pitchFamily="34" charset="0"/>
+              <a:buChar char="•"/>
+              <a:defRPr sz="1800" kern="1200">
+                <a:solidFill>
+                  <a:schemeClr val="tx1"/>
+                </a:solidFill>
+                <a:latin typeface="+mn-lt"/>
+                <a:ea typeface="+mn-ea"/>
+                <a:cs typeface="+mn-cs"/>
+              </a:defRPr>
+            </a:lvl7pPr>
+            <a:lvl8pPr marL="3429000" indent="-228600" algn="l" defTabSz="914400" rtl="0" eaLnBrk="1" latinLnBrk="0" hangingPunct="1">
+              <a:lnSpc>
+                <a:spcPct val="90000"/>
+              </a:lnSpc>
+              <a:spcBef>
+                <a:spcPts val="500"/>
+              </a:spcBef>
+              <a:buFont typeface="Arial" panose="020B0604020202020204" pitchFamily="34" charset="0"/>
+              <a:buChar char="•"/>
+              <a:defRPr sz="1800" kern="1200">
+                <a:solidFill>
+                  <a:schemeClr val="tx1"/>
+                </a:solidFill>
+                <a:latin typeface="+mn-lt"/>
+                <a:ea typeface="+mn-ea"/>
+                <a:cs typeface="+mn-cs"/>
+              </a:defRPr>
+            </a:lvl8pPr>
+            <a:lvl9pPr marL="3886200" indent="-228600" algn="l" defTabSz="914400" rtl="0" eaLnBrk="1" latinLnBrk="0" hangingPunct="1">
+              <a:lnSpc>
+                <a:spcPct val="90000"/>
+              </a:lnSpc>
+              <a:spcBef>
+                <a:spcPts val="500"/>
+              </a:spcBef>
+              <a:buFont typeface="Arial" panose="020B0604020202020204" pitchFamily="34" charset="0"/>
+              <a:buChar char="•"/>
+              <a:defRPr sz="1800" kern="1200">
+                <a:solidFill>
+                  <a:schemeClr val="tx1"/>
+                </a:solidFill>
+                <a:latin typeface="+mn-lt"/>
+                <a:ea typeface="+mn-ea"/>
+                <a:cs typeface="+mn-cs"/>
+              </a:defRPr>
+            </a:lvl9pPr>
+          </a:lstStyle>
+          <a:p>
+            <a:pPr marL="0" indent="0" algn="ctr">
+              <a:buNone/>
+            </a:pPr>
+            <a:r>
+              <a:rPr lang="hu-HU" dirty="0"/>
+              <a:t>Testing</a:t>
+            </a:r>
+          </a:p>
+          <a:p>
+            <a:pPr algn="ctr"/>
+            <a:r>
+              <a:rPr lang="hu-HU" sz="2000" dirty="0"/>
+              <a:t>Backend - JEST</a:t>
+            </a:r>
+          </a:p>
+          <a:p>
+            <a:pPr algn="ctr"/>
+            <a:r>
+              <a:rPr lang="hu-HU" sz="2000" dirty="0"/>
+              <a:t>Frontend - </a:t>
+            </a:r>
+            <a:r>
+              <a:rPr lang="hu-HU" sz="2000" dirty="0" err="1"/>
+              <a:t>Playwright</a:t>
+            </a:r>
+            <a:endParaRPr lang="hu-HU" sz="2000" dirty="0"/>
+          </a:p>
+        </p:txBody>
+      </p:sp>
+      <p:sp>
+        <p:nvSpPr>
+          <p:cNvPr id="8" name="Tartalom helye 2">
+            <a:extLst>
+              <a:ext uri="{FF2B5EF4-FFF2-40B4-BE49-F238E27FC236}">
+                <a16:creationId xmlns:a16="http://schemas.microsoft.com/office/drawing/2014/main" id="{50B6C58F-E40A-4F8F-800B-1445B27BFEEC}"/>
+              </a:ext>
+            </a:extLst>
+          </p:cNvPr>
+          <p:cNvSpPr txBox="1">
+            <a:spLocks/>
+          </p:cNvSpPr>
+          <p:nvPr/>
+        </p:nvSpPr>
+        <p:spPr>
+          <a:xfrm>
+            <a:off x="6096000" y="4219575"/>
+            <a:ext cx="5257800" cy="2165350"/>
+          </a:xfrm>
+          <a:prstGeom prst="rect">
+            <a:avLst/>
+          </a:prstGeom>
+        </p:spPr>
+        <p:txBody>
+          <a:bodyPr vert="horz" lIns="91440" tIns="45720" rIns="91440" bIns="45720" rtlCol="0">
+            <a:normAutofit/>
+          </a:bodyPr>
+          <a:lstStyle>
+            <a:lvl1pPr marL="228600" indent="-228600" algn="l" defTabSz="914400" rtl="0" eaLnBrk="1" latinLnBrk="0" hangingPunct="1">
+              <a:lnSpc>
+                <a:spcPct val="90000"/>
+              </a:lnSpc>
+              <a:spcBef>
+                <a:spcPts val="1000"/>
+              </a:spcBef>
+              <a:buFont typeface="Arial" panose="020B0604020202020204" pitchFamily="34" charset="0"/>
+              <a:buChar char="•"/>
+              <a:defRPr sz="2800" kern="1200">
+                <a:solidFill>
+                  <a:schemeClr val="bg1"/>
+                </a:solidFill>
+                <a:latin typeface="+mn-lt"/>
+                <a:ea typeface="+mn-ea"/>
+                <a:cs typeface="+mn-cs"/>
+              </a:defRPr>
+            </a:lvl1pPr>
+            <a:lvl2pPr marL="685800" indent="-228600" algn="l" defTabSz="914400" rtl="0" eaLnBrk="1" latinLnBrk="0" hangingPunct="1">
+              <a:lnSpc>
+                <a:spcPct val="90000"/>
+              </a:lnSpc>
+              <a:spcBef>
+                <a:spcPts val="500"/>
+              </a:spcBef>
+              <a:buFont typeface="Arial" panose="020B0604020202020204" pitchFamily="34" charset="0"/>
+              <a:buChar char="•"/>
+              <a:defRPr sz="2400" kern="1200">
+                <a:solidFill>
+                  <a:schemeClr val="bg1"/>
+                </a:solidFill>
+                <a:latin typeface="+mn-lt"/>
+                <a:ea typeface="+mn-ea"/>
+                <a:cs typeface="+mn-cs"/>
+              </a:defRPr>
+            </a:lvl2pPr>
+            <a:lvl3pPr marL="1143000" indent="-228600" algn="l" defTabSz="914400" rtl="0" eaLnBrk="1" latinLnBrk="0" hangingPunct="1">
+              <a:lnSpc>
+                <a:spcPct val="90000"/>
+              </a:lnSpc>
+              <a:spcBef>
+                <a:spcPts val="500"/>
+              </a:spcBef>
+              <a:buFont typeface="Arial" panose="020B0604020202020204" pitchFamily="34" charset="0"/>
+              <a:buChar char="•"/>
+              <a:defRPr sz="2000" kern="1200">
+                <a:solidFill>
+                  <a:schemeClr val="bg1"/>
+                </a:solidFill>
+                <a:latin typeface="+mn-lt"/>
+                <a:ea typeface="+mn-ea"/>
+                <a:cs typeface="+mn-cs"/>
+              </a:defRPr>
+            </a:lvl3pPr>
+            <a:lvl4pPr marL="1600200" indent="-228600" algn="l" defTabSz="914400" rtl="0" eaLnBrk="1" latinLnBrk="0" hangingPunct="1">
+              <a:lnSpc>
+                <a:spcPct val="90000"/>
+              </a:lnSpc>
+              <a:spcBef>
+                <a:spcPts val="500"/>
+              </a:spcBef>
+              <a:buFont typeface="Arial" panose="020B0604020202020204" pitchFamily="34" charset="0"/>
+              <a:buChar char="•"/>
+              <a:defRPr sz="1800" kern="1200">
+                <a:solidFill>
+                  <a:schemeClr val="bg1"/>
+                </a:solidFill>
+                <a:latin typeface="+mn-lt"/>
+                <a:ea typeface="+mn-ea"/>
+                <a:cs typeface="+mn-cs"/>
+              </a:defRPr>
+            </a:lvl4pPr>
+            <a:lvl5pPr marL="2057400" indent="-228600" algn="l" defTabSz="914400" rtl="0" eaLnBrk="1" latinLnBrk="0" hangingPunct="1">
+              <a:lnSpc>
+                <a:spcPct val="90000"/>
+              </a:lnSpc>
+              <a:spcBef>
+                <a:spcPts val="500"/>
+              </a:spcBef>
+              <a:buFont typeface="Arial" panose="020B0604020202020204" pitchFamily="34" charset="0"/>
+              <a:buChar char="•"/>
+              <a:defRPr sz="1800" kern="1200">
+                <a:solidFill>
+                  <a:schemeClr val="bg1"/>
+                </a:solidFill>
+                <a:latin typeface="+mn-lt"/>
+                <a:ea typeface="+mn-ea"/>
+                <a:cs typeface="+mn-cs"/>
+              </a:defRPr>
+            </a:lvl5pPr>
+            <a:lvl6pPr marL="2514600" indent="-228600" algn="l" defTabSz="914400" rtl="0" eaLnBrk="1" latinLnBrk="0" hangingPunct="1">
+              <a:lnSpc>
+                <a:spcPct val="90000"/>
+              </a:lnSpc>
+              <a:spcBef>
+                <a:spcPts val="500"/>
+              </a:spcBef>
+              <a:buFont typeface="Arial" panose="020B0604020202020204" pitchFamily="34" charset="0"/>
+              <a:buChar char="•"/>
+              <a:defRPr sz="1800" kern="1200">
+                <a:solidFill>
+                  <a:schemeClr val="tx1"/>
+                </a:solidFill>
+                <a:latin typeface="+mn-lt"/>
+                <a:ea typeface="+mn-ea"/>
+                <a:cs typeface="+mn-cs"/>
+              </a:defRPr>
+            </a:lvl6pPr>
+            <a:lvl7pPr marL="2971800" indent="-228600" algn="l" defTabSz="914400" rtl="0" eaLnBrk="1" latinLnBrk="0" hangingPunct="1">
+              <a:lnSpc>
+                <a:spcPct val="90000"/>
+              </a:lnSpc>
+              <a:spcBef>
+                <a:spcPts val="500"/>
+              </a:spcBef>
+              <a:buFont typeface="Arial" panose="020B0604020202020204" pitchFamily="34" charset="0"/>
+              <a:buChar char="•"/>
+              <a:defRPr sz="1800" kern="1200">
+                <a:solidFill>
+                  <a:schemeClr val="tx1"/>
+                </a:solidFill>
+                <a:latin typeface="+mn-lt"/>
+                <a:ea typeface="+mn-ea"/>
+                <a:cs typeface="+mn-cs"/>
+              </a:defRPr>
+            </a:lvl7pPr>
+            <a:lvl8pPr marL="3429000" indent="-228600" algn="l" defTabSz="914400" rtl="0" eaLnBrk="1" latinLnBrk="0" hangingPunct="1">
+              <a:lnSpc>
+                <a:spcPct val="90000"/>
+              </a:lnSpc>
+              <a:spcBef>
+                <a:spcPts val="500"/>
+              </a:spcBef>
+              <a:buFont typeface="Arial" panose="020B0604020202020204" pitchFamily="34" charset="0"/>
+              <a:buChar char="•"/>
+              <a:defRPr sz="1800" kern="1200">
+                <a:solidFill>
+                  <a:schemeClr val="tx1"/>
+                </a:solidFill>
+                <a:latin typeface="+mn-lt"/>
+                <a:ea typeface="+mn-ea"/>
+                <a:cs typeface="+mn-cs"/>
+              </a:defRPr>
+            </a:lvl8pPr>
+            <a:lvl9pPr marL="3886200" indent="-228600" algn="l" defTabSz="914400" rtl="0" eaLnBrk="1" latinLnBrk="0" hangingPunct="1">
+              <a:lnSpc>
+                <a:spcPct val="90000"/>
+              </a:lnSpc>
+              <a:spcBef>
+                <a:spcPts val="500"/>
+              </a:spcBef>
+              <a:buFont typeface="Arial" panose="020B0604020202020204" pitchFamily="34" charset="0"/>
+              <a:buChar char="•"/>
+              <a:defRPr sz="1800" kern="1200">
+                <a:solidFill>
+                  <a:schemeClr val="tx1"/>
+                </a:solidFill>
+                <a:latin typeface="+mn-lt"/>
+                <a:ea typeface="+mn-ea"/>
+                <a:cs typeface="+mn-cs"/>
+              </a:defRPr>
+            </a:lvl9pPr>
+          </a:lstStyle>
+          <a:p>
+            <a:pPr marL="0" indent="0" algn="ctr">
+              <a:buNone/>
+            </a:pPr>
+            <a:r>
+              <a:rPr lang="hu-HU" dirty="0" err="1"/>
+              <a:t>Database</a:t>
+            </a:r>
+            <a:endParaRPr lang="hu-HU" dirty="0"/>
+          </a:p>
+          <a:p>
+            <a:pPr algn="ctr"/>
+            <a:r>
+              <a:rPr lang="hu-HU" sz="2000" dirty="0" err="1"/>
+              <a:t>Prisma</a:t>
+            </a:r>
+            <a:endParaRPr lang="hu-HU" sz="2000" dirty="0"/>
+          </a:p>
+          <a:p>
+            <a:pPr algn="ctr"/>
+            <a:r>
+              <a:rPr lang="hu-HU" sz="2000" dirty="0" err="1"/>
+              <a:t>MySQL</a:t>
+            </a:r>
+            <a:endParaRPr lang="hu-HU" sz="2000" dirty="0"/>
+          </a:p>
+        </p:txBody>
+      </p:sp>
+      <p:sp>
+        <p:nvSpPr>
+          <p:cNvPr id="9" name="Tartalom helye 2">
+            <a:extLst>
+              <a:ext uri="{FF2B5EF4-FFF2-40B4-BE49-F238E27FC236}">
+                <a16:creationId xmlns:a16="http://schemas.microsoft.com/office/drawing/2014/main" id="{AE28F228-2744-FF09-85FF-9204619B94E2}"/>
+              </a:ext>
+            </a:extLst>
+          </p:cNvPr>
+          <p:cNvSpPr txBox="1">
+            <a:spLocks/>
+          </p:cNvSpPr>
+          <p:nvPr/>
+        </p:nvSpPr>
+        <p:spPr>
+          <a:xfrm>
+            <a:off x="6096000" y="1825625"/>
+            <a:ext cx="5257800" cy="2165350"/>
+          </a:xfrm>
+          <a:prstGeom prst="rect">
+            <a:avLst/>
+          </a:prstGeom>
+        </p:spPr>
+        <p:txBody>
+          <a:bodyPr vert="horz" lIns="91440" tIns="45720" rIns="91440" bIns="45720" rtlCol="0">
+            <a:normAutofit/>
+          </a:bodyPr>
+          <a:lstStyle>
+            <a:lvl1pPr marL="228600" indent="-228600" algn="l" defTabSz="914400" rtl="0" eaLnBrk="1" latinLnBrk="0" hangingPunct="1">
+              <a:lnSpc>
+                <a:spcPct val="90000"/>
+              </a:lnSpc>
+              <a:spcBef>
+                <a:spcPts val="1000"/>
+              </a:spcBef>
+              <a:buFont typeface="Arial" panose="020B0604020202020204" pitchFamily="34" charset="0"/>
+              <a:buChar char="•"/>
+              <a:defRPr sz="2800" kern="1200">
+                <a:solidFill>
+                  <a:schemeClr val="bg1"/>
+                </a:solidFill>
+                <a:latin typeface="+mn-lt"/>
+                <a:ea typeface="+mn-ea"/>
+                <a:cs typeface="+mn-cs"/>
+              </a:defRPr>
+            </a:lvl1pPr>
+            <a:lvl2pPr marL="685800" indent="-228600" algn="l" defTabSz="914400" rtl="0" eaLnBrk="1" latinLnBrk="0" hangingPunct="1">
+              <a:lnSpc>
+                <a:spcPct val="90000"/>
+              </a:lnSpc>
+              <a:spcBef>
+                <a:spcPts val="500"/>
+              </a:spcBef>
+              <a:buFont typeface="Arial" panose="020B0604020202020204" pitchFamily="34" charset="0"/>
+              <a:buChar char="•"/>
+              <a:defRPr sz="2400" kern="1200">
+                <a:solidFill>
+                  <a:schemeClr val="bg1"/>
+                </a:solidFill>
+                <a:latin typeface="+mn-lt"/>
+                <a:ea typeface="+mn-ea"/>
+                <a:cs typeface="+mn-cs"/>
+              </a:defRPr>
+            </a:lvl2pPr>
+            <a:lvl3pPr marL="1143000" indent="-228600" algn="l" defTabSz="914400" rtl="0" eaLnBrk="1" latinLnBrk="0" hangingPunct="1">
+              <a:lnSpc>
+                <a:spcPct val="90000"/>
+              </a:lnSpc>
+              <a:spcBef>
+                <a:spcPts val="500"/>
+              </a:spcBef>
+              <a:buFont typeface="Arial" panose="020B0604020202020204" pitchFamily="34" charset="0"/>
+              <a:buChar char="•"/>
+              <a:defRPr sz="2000" kern="1200">
+                <a:solidFill>
+                  <a:schemeClr val="bg1"/>
+                </a:solidFill>
+                <a:latin typeface="+mn-lt"/>
+                <a:ea typeface="+mn-ea"/>
+                <a:cs typeface="+mn-cs"/>
+              </a:defRPr>
+            </a:lvl3pPr>
+            <a:lvl4pPr marL="1600200" indent="-228600" algn="l" defTabSz="914400" rtl="0" eaLnBrk="1" latinLnBrk="0" hangingPunct="1">
+              <a:lnSpc>
+                <a:spcPct val="90000"/>
+              </a:lnSpc>
+              <a:spcBef>
+                <a:spcPts val="500"/>
+              </a:spcBef>
+              <a:buFont typeface="Arial" panose="020B0604020202020204" pitchFamily="34" charset="0"/>
+              <a:buChar char="•"/>
+              <a:defRPr sz="1800" kern="1200">
+                <a:solidFill>
+                  <a:schemeClr val="bg1"/>
+                </a:solidFill>
+                <a:latin typeface="+mn-lt"/>
+                <a:ea typeface="+mn-ea"/>
+                <a:cs typeface="+mn-cs"/>
+              </a:defRPr>
+            </a:lvl4pPr>
+            <a:lvl5pPr marL="2057400" indent="-228600" algn="l" defTabSz="914400" rtl="0" eaLnBrk="1" latinLnBrk="0" hangingPunct="1">
+              <a:lnSpc>
+                <a:spcPct val="90000"/>
+              </a:lnSpc>
+              <a:spcBef>
+                <a:spcPts val="500"/>
+              </a:spcBef>
+              <a:buFont typeface="Arial" panose="020B0604020202020204" pitchFamily="34" charset="0"/>
+              <a:buChar char="•"/>
+              <a:defRPr sz="1800" kern="1200">
+                <a:solidFill>
+                  <a:schemeClr val="bg1"/>
+                </a:solidFill>
+                <a:latin typeface="+mn-lt"/>
+                <a:ea typeface="+mn-ea"/>
+                <a:cs typeface="+mn-cs"/>
+              </a:defRPr>
+            </a:lvl5pPr>
+            <a:lvl6pPr marL="2514600" indent="-228600" algn="l" defTabSz="914400" rtl="0" eaLnBrk="1" latinLnBrk="0" hangingPunct="1">
+              <a:lnSpc>
+                <a:spcPct val="90000"/>
+              </a:lnSpc>
+              <a:spcBef>
+                <a:spcPts val="500"/>
+              </a:spcBef>
+              <a:buFont typeface="Arial" panose="020B0604020202020204" pitchFamily="34" charset="0"/>
+              <a:buChar char="•"/>
+              <a:defRPr sz="1800" kern="1200">
+                <a:solidFill>
+                  <a:schemeClr val="tx1"/>
+                </a:solidFill>
+                <a:latin typeface="+mn-lt"/>
+                <a:ea typeface="+mn-ea"/>
+                <a:cs typeface="+mn-cs"/>
+              </a:defRPr>
+            </a:lvl6pPr>
+            <a:lvl7pPr marL="2971800" indent="-228600" algn="l" defTabSz="914400" rtl="0" eaLnBrk="1" latinLnBrk="0" hangingPunct="1">
+              <a:lnSpc>
+                <a:spcPct val="90000"/>
+              </a:lnSpc>
+              <a:spcBef>
+                <a:spcPts val="500"/>
+              </a:spcBef>
+              <a:buFont typeface="Arial" panose="020B0604020202020204" pitchFamily="34" charset="0"/>
+              <a:buChar char="•"/>
+              <a:defRPr sz="1800" kern="1200">
+                <a:solidFill>
+                  <a:schemeClr val="tx1"/>
+                </a:solidFill>
+                <a:latin typeface="+mn-lt"/>
+                <a:ea typeface="+mn-ea"/>
+                <a:cs typeface="+mn-cs"/>
+              </a:defRPr>
+            </a:lvl7pPr>
+            <a:lvl8pPr marL="3429000" indent="-228600" algn="l" defTabSz="914400" rtl="0" eaLnBrk="1" latinLnBrk="0" hangingPunct="1">
+              <a:lnSpc>
+                <a:spcPct val="90000"/>
+              </a:lnSpc>
+              <a:spcBef>
+                <a:spcPts val="500"/>
+              </a:spcBef>
+              <a:buFont typeface="Arial" panose="020B0604020202020204" pitchFamily="34" charset="0"/>
+              <a:buChar char="•"/>
+              <a:defRPr sz="1800" kern="1200">
+                <a:solidFill>
+                  <a:schemeClr val="tx1"/>
+                </a:solidFill>
+                <a:latin typeface="+mn-lt"/>
+                <a:ea typeface="+mn-ea"/>
+                <a:cs typeface="+mn-cs"/>
+              </a:defRPr>
+            </a:lvl8pPr>
+            <a:lvl9pPr marL="3886200" indent="-228600" algn="l" defTabSz="914400" rtl="0" eaLnBrk="1" latinLnBrk="0" hangingPunct="1">
+              <a:lnSpc>
+                <a:spcPct val="90000"/>
+              </a:lnSpc>
+              <a:spcBef>
+                <a:spcPts val="500"/>
+              </a:spcBef>
+              <a:buFont typeface="Arial" panose="020B0604020202020204" pitchFamily="34" charset="0"/>
+              <a:buChar char="•"/>
+              <a:defRPr sz="1800" kern="1200">
+                <a:solidFill>
+                  <a:schemeClr val="tx1"/>
+                </a:solidFill>
+                <a:latin typeface="+mn-lt"/>
+                <a:ea typeface="+mn-ea"/>
+                <a:cs typeface="+mn-cs"/>
+              </a:defRPr>
+            </a:lvl9pPr>
+          </a:lstStyle>
+          <a:p>
+            <a:pPr marL="0" indent="0" algn="ctr">
+              <a:buNone/>
+            </a:pPr>
+            <a:r>
+              <a:rPr lang="hu-HU" dirty="0"/>
+              <a:t>Backend</a:t>
+            </a:r>
+          </a:p>
+          <a:p>
+            <a:pPr algn="ctr"/>
+            <a:r>
+              <a:rPr lang="hu-HU" sz="2000" dirty="0"/>
+              <a:t>Node.js</a:t>
+            </a:r>
+          </a:p>
+          <a:p>
+            <a:pPr algn="ctr"/>
+            <a:r>
+              <a:rPr lang="hu-HU" sz="2000" dirty="0"/>
+              <a:t>Express.js</a:t>
+            </a:r>
+          </a:p>
+          <a:p>
+            <a:pPr algn="ctr"/>
+            <a:r>
+              <a:rPr lang="hu-HU" sz="2000" dirty="0" err="1"/>
+              <a:t>Multer</a:t>
+            </a:r>
+            <a:endParaRPr lang="hu-HU" sz="2000" dirty="0"/>
+          </a:p>
+          <a:p>
+            <a:pPr algn="ctr"/>
+            <a:r>
+              <a:rPr lang="hu-HU" sz="2000" dirty="0"/>
+              <a:t>Socket.io</a:t>
+            </a:r>
+          </a:p>
+        </p:txBody>
+      </p:sp>
+    </p:spTree>
+    <p:extLst>
+      <p:ext uri="{BB962C8B-B14F-4D97-AF65-F5344CB8AC3E}">
+        <p14:creationId xmlns:p14="http://schemas.microsoft.com/office/powerpoint/2010/main" val="348884825"/>
+      </p:ext>
+    </p:extLst>
+  </p:cSld>
+  <p:clrMapOvr>
+    <a:masterClrMapping/>
+  </p:clrMapOvr>
+  <p:transition spd="slow">
+    <p:push dir="u"/>
+  </p:transition>
+</p:sld>
+</file>
+
+<file path=ppt/slides/slide5.xml><?xml version="1.0" encoding="utf-8"?>
+<p:sld xmlns:a="http://schemas.openxmlformats.org/drawingml/2006/main" xmlns:r="http://schemas.openxmlformats.org/officeDocument/2006/relationships" xmlns:p="http://schemas.openxmlformats.org/presentationml/2006/main">
+  <p:cSld>
+    <p:spTree>
+      <p:nvGrpSpPr>
+        <p:cNvPr id="1" name=""/>
+        <p:cNvGrpSpPr/>
+        <p:nvPr/>
+      </p:nvGrpSpPr>
+      <p:grpSpPr>
+        <a:xfrm>
+          <a:off x="0" y="0"/>
+          <a:ext cx="0" cy="0"/>
+          <a:chOff x="0" y="0"/>
+          <a:chExt cx="0" cy="0"/>
+        </a:xfrm>
+      </p:grpSpPr>
+      <p:sp>
+        <p:nvSpPr>
+          <p:cNvPr id="2" name="Cím 1">
+            <a:extLst>
+              <a:ext uri="{FF2B5EF4-FFF2-40B4-BE49-F238E27FC236}">
+                <a16:creationId xmlns:a16="http://schemas.microsoft.com/office/drawing/2014/main" id="{9C9F76E7-C252-4104-6056-3078DC365634}"/>
+              </a:ext>
+            </a:extLst>
+          </p:cNvPr>
+          <p:cNvSpPr>
+            <a:spLocks noGrp="1"/>
+          </p:cNvSpPr>
+          <p:nvPr>
+            <p:ph type="title"/>
+          </p:nvPr>
+        </p:nvSpPr>
+        <p:spPr/>
+        <p:txBody>
+          <a:bodyPr/>
+          <a:lstStyle/>
+          <a:p>
+            <a:r>
+              <a:rPr lang="hu-HU" dirty="0"/>
+              <a:t>Project management </a:t>
+            </a:r>
+            <a:r>
+              <a:rPr lang="hu-HU" dirty="0" err="1"/>
+              <a:t>tools</a:t>
+            </a:r>
+            <a:endParaRPr lang="hu-HU" dirty="0"/>
+          </a:p>
+        </p:txBody>
+      </p:sp>
+      <p:sp>
+        <p:nvSpPr>
+          <p:cNvPr id="3" name="Tartalom helye 2">
+            <a:extLst>
+              <a:ext uri="{FF2B5EF4-FFF2-40B4-BE49-F238E27FC236}">
+                <a16:creationId xmlns:a16="http://schemas.microsoft.com/office/drawing/2014/main" id="{D10ECDA6-40AF-1FA7-2A68-68D2D57F7DF2}"/>
+              </a:ext>
+            </a:extLst>
+          </p:cNvPr>
+          <p:cNvSpPr>
+            <a:spLocks noGrp="1"/>
+          </p:cNvSpPr>
+          <p:nvPr>
+            <p:ph idx="1"/>
+          </p:nvPr>
+        </p:nvSpPr>
+        <p:spPr>
+          <a:xfrm>
+            <a:off x="838200" y="1825625"/>
+            <a:ext cx="3028950" cy="1155700"/>
+          </a:xfrm>
+        </p:spPr>
+        <p:txBody>
+          <a:bodyPr/>
+          <a:lstStyle/>
+          <a:p>
+            <a:pPr marL="0" indent="0" algn="ctr">
+              <a:buNone/>
+            </a:pPr>
+            <a:r>
+              <a:rPr lang="hu-HU" b="1" dirty="0" err="1"/>
+              <a:t>Canva</a:t>
+            </a:r>
+            <a:endParaRPr lang="hu-HU" b="1" dirty="0"/>
+          </a:p>
+          <a:p>
+            <a:pPr marL="0" indent="0" algn="ctr">
+              <a:buNone/>
+            </a:pPr>
+            <a:r>
+              <a:rPr lang="hu-HU" sz="2000" dirty="0" err="1"/>
+              <a:t>Logo</a:t>
+            </a:r>
+            <a:r>
+              <a:rPr lang="hu-HU" sz="2000" dirty="0"/>
+              <a:t> design</a:t>
+            </a:r>
+          </a:p>
+        </p:txBody>
+      </p:sp>
+      <p:sp>
+        <p:nvSpPr>
+          <p:cNvPr id="4" name="Tartalom helye 2">
+            <a:extLst>
+              <a:ext uri="{FF2B5EF4-FFF2-40B4-BE49-F238E27FC236}">
+                <a16:creationId xmlns:a16="http://schemas.microsoft.com/office/drawing/2014/main" id="{92D3BC15-C25C-7036-9A13-08C1DA2004CB}"/>
+              </a:ext>
+            </a:extLst>
+          </p:cNvPr>
+          <p:cNvSpPr txBox="1">
+            <a:spLocks/>
+          </p:cNvSpPr>
+          <p:nvPr/>
+        </p:nvSpPr>
+        <p:spPr>
+          <a:xfrm>
+            <a:off x="2152650" y="3987800"/>
+            <a:ext cx="3028950" cy="1155700"/>
+          </a:xfrm>
+          <a:prstGeom prst="rect">
+            <a:avLst/>
+          </a:prstGeom>
+        </p:spPr>
+        <p:txBody>
+          <a:bodyPr vert="horz" lIns="91440" tIns="45720" rIns="91440" bIns="45720" rtlCol="0">
+            <a:normAutofit/>
+          </a:bodyPr>
+          <a:lstStyle>
+            <a:lvl1pPr marL="228600" indent="-228600" algn="l" defTabSz="914400" rtl="0" eaLnBrk="1" latinLnBrk="0" hangingPunct="1">
+              <a:lnSpc>
+                <a:spcPct val="90000"/>
+              </a:lnSpc>
+              <a:spcBef>
+                <a:spcPts val="1000"/>
+              </a:spcBef>
+              <a:buFont typeface="Arial" panose="020B0604020202020204" pitchFamily="34" charset="0"/>
+              <a:buChar char="•"/>
+              <a:defRPr sz="2800" kern="1200">
+                <a:solidFill>
+                  <a:schemeClr val="bg1"/>
+                </a:solidFill>
+                <a:latin typeface="+mn-lt"/>
+                <a:ea typeface="+mn-ea"/>
+                <a:cs typeface="+mn-cs"/>
+              </a:defRPr>
+            </a:lvl1pPr>
+            <a:lvl2pPr marL="685800" indent="-228600" algn="l" defTabSz="914400" rtl="0" eaLnBrk="1" latinLnBrk="0" hangingPunct="1">
+              <a:lnSpc>
+                <a:spcPct val="90000"/>
+              </a:lnSpc>
+              <a:spcBef>
+                <a:spcPts val="500"/>
+              </a:spcBef>
+              <a:buFont typeface="Arial" panose="020B0604020202020204" pitchFamily="34" charset="0"/>
+              <a:buChar char="•"/>
+              <a:defRPr sz="2400" kern="1200">
+                <a:solidFill>
+                  <a:schemeClr val="bg1"/>
+                </a:solidFill>
+                <a:latin typeface="+mn-lt"/>
+                <a:ea typeface="+mn-ea"/>
+                <a:cs typeface="+mn-cs"/>
+              </a:defRPr>
+            </a:lvl2pPr>
+            <a:lvl3pPr marL="1143000" indent="-228600" algn="l" defTabSz="914400" rtl="0" eaLnBrk="1" latinLnBrk="0" hangingPunct="1">
+              <a:lnSpc>
+                <a:spcPct val="90000"/>
+              </a:lnSpc>
+              <a:spcBef>
+                <a:spcPts val="500"/>
+              </a:spcBef>
+              <a:buFont typeface="Arial" panose="020B0604020202020204" pitchFamily="34" charset="0"/>
+              <a:buChar char="•"/>
+              <a:defRPr sz="2000" kern="1200">
+                <a:solidFill>
+                  <a:schemeClr val="bg1"/>
+                </a:solidFill>
+                <a:latin typeface="+mn-lt"/>
+                <a:ea typeface="+mn-ea"/>
+                <a:cs typeface="+mn-cs"/>
+              </a:defRPr>
+            </a:lvl3pPr>
+            <a:lvl4pPr marL="1600200" indent="-228600" algn="l" defTabSz="914400" rtl="0" eaLnBrk="1" latinLnBrk="0" hangingPunct="1">
+              <a:lnSpc>
+                <a:spcPct val="90000"/>
+              </a:lnSpc>
+              <a:spcBef>
+                <a:spcPts val="500"/>
+              </a:spcBef>
+              <a:buFont typeface="Arial" panose="020B0604020202020204" pitchFamily="34" charset="0"/>
+              <a:buChar char="•"/>
+              <a:defRPr sz="1800" kern="1200">
+                <a:solidFill>
+                  <a:schemeClr val="bg1"/>
+                </a:solidFill>
+                <a:latin typeface="+mn-lt"/>
+                <a:ea typeface="+mn-ea"/>
+                <a:cs typeface="+mn-cs"/>
+              </a:defRPr>
+            </a:lvl4pPr>
+            <a:lvl5pPr marL="2057400" indent="-228600" algn="l" defTabSz="914400" rtl="0" eaLnBrk="1" latinLnBrk="0" hangingPunct="1">
+              <a:lnSpc>
+                <a:spcPct val="90000"/>
+              </a:lnSpc>
+              <a:spcBef>
+                <a:spcPts val="500"/>
+              </a:spcBef>
+              <a:buFont typeface="Arial" panose="020B0604020202020204" pitchFamily="34" charset="0"/>
+              <a:buChar char="•"/>
+              <a:defRPr sz="1800" kern="1200">
+                <a:solidFill>
+                  <a:schemeClr val="bg1"/>
+                </a:solidFill>
+                <a:latin typeface="+mn-lt"/>
+                <a:ea typeface="+mn-ea"/>
+                <a:cs typeface="+mn-cs"/>
+              </a:defRPr>
+            </a:lvl5pPr>
+            <a:lvl6pPr marL="2514600" indent="-228600" algn="l" defTabSz="914400" rtl="0" eaLnBrk="1" latinLnBrk="0" hangingPunct="1">
+              <a:lnSpc>
+                <a:spcPct val="90000"/>
+              </a:lnSpc>
+              <a:spcBef>
+                <a:spcPts val="500"/>
+              </a:spcBef>
+              <a:buFont typeface="Arial" panose="020B0604020202020204" pitchFamily="34" charset="0"/>
+              <a:buChar char="•"/>
+              <a:defRPr sz="1800" kern="1200">
+                <a:solidFill>
+                  <a:schemeClr val="tx1"/>
+                </a:solidFill>
+                <a:latin typeface="+mn-lt"/>
+                <a:ea typeface="+mn-ea"/>
+                <a:cs typeface="+mn-cs"/>
+              </a:defRPr>
+            </a:lvl6pPr>
+            <a:lvl7pPr marL="2971800" indent="-228600" algn="l" defTabSz="914400" rtl="0" eaLnBrk="1" latinLnBrk="0" hangingPunct="1">
+              <a:lnSpc>
+                <a:spcPct val="90000"/>
+              </a:lnSpc>
+              <a:spcBef>
+                <a:spcPts val="500"/>
+              </a:spcBef>
+              <a:buFont typeface="Arial" panose="020B0604020202020204" pitchFamily="34" charset="0"/>
+              <a:buChar char="•"/>
+              <a:defRPr sz="1800" kern="1200">
+                <a:solidFill>
+                  <a:schemeClr val="tx1"/>
+                </a:solidFill>
+                <a:latin typeface="+mn-lt"/>
+                <a:ea typeface="+mn-ea"/>
+                <a:cs typeface="+mn-cs"/>
+              </a:defRPr>
+            </a:lvl7pPr>
+            <a:lvl8pPr marL="3429000" indent="-228600" algn="l" defTabSz="914400" rtl="0" eaLnBrk="1" latinLnBrk="0" hangingPunct="1">
+              <a:lnSpc>
+                <a:spcPct val="90000"/>
+              </a:lnSpc>
+              <a:spcBef>
+                <a:spcPts val="500"/>
+              </a:spcBef>
+              <a:buFont typeface="Arial" panose="020B0604020202020204" pitchFamily="34" charset="0"/>
+              <a:buChar char="•"/>
+              <a:defRPr sz="1800" kern="1200">
+                <a:solidFill>
+                  <a:schemeClr val="tx1"/>
+                </a:solidFill>
+                <a:latin typeface="+mn-lt"/>
+                <a:ea typeface="+mn-ea"/>
+                <a:cs typeface="+mn-cs"/>
+              </a:defRPr>
+            </a:lvl8pPr>
+            <a:lvl9pPr marL="3886200" indent="-228600" algn="l" defTabSz="914400" rtl="0" eaLnBrk="1" latinLnBrk="0" hangingPunct="1">
+              <a:lnSpc>
+                <a:spcPct val="90000"/>
+              </a:lnSpc>
+              <a:spcBef>
+                <a:spcPts val="500"/>
+              </a:spcBef>
+              <a:buFont typeface="Arial" panose="020B0604020202020204" pitchFamily="34" charset="0"/>
+              <a:buChar char="•"/>
+              <a:defRPr sz="1800" kern="1200">
+                <a:solidFill>
+                  <a:schemeClr val="tx1"/>
+                </a:solidFill>
+                <a:latin typeface="+mn-lt"/>
+                <a:ea typeface="+mn-ea"/>
+                <a:cs typeface="+mn-cs"/>
+              </a:defRPr>
+            </a:lvl9pPr>
+          </a:lstStyle>
+          <a:p>
+            <a:pPr marL="0" indent="0" algn="ctr">
+              <a:buFont typeface="Arial" panose="020B0604020202020204" pitchFamily="34" charset="0"/>
+              <a:buNone/>
+            </a:pPr>
+            <a:r>
+              <a:rPr lang="hu-HU" b="1" dirty="0" err="1"/>
+              <a:t>Figma</a:t>
+            </a:r>
+            <a:endParaRPr lang="hu-HU" b="1" dirty="0"/>
+          </a:p>
+          <a:p>
+            <a:pPr marL="0" indent="0" algn="ctr">
+              <a:buFont typeface="Arial" panose="020B0604020202020204" pitchFamily="34" charset="0"/>
+              <a:buNone/>
+            </a:pPr>
+            <a:r>
+              <a:rPr lang="hu-HU" sz="2000" dirty="0" err="1"/>
+              <a:t>Plan</a:t>
+            </a:r>
+            <a:r>
+              <a:rPr lang="hu-HU" sz="2000" dirty="0"/>
+              <a:t> designing</a:t>
+            </a:r>
+          </a:p>
+        </p:txBody>
+      </p:sp>
+      <p:sp>
+        <p:nvSpPr>
+          <p:cNvPr id="5" name="Tartalom helye 2">
+            <a:extLst>
+              <a:ext uri="{FF2B5EF4-FFF2-40B4-BE49-F238E27FC236}">
+                <a16:creationId xmlns:a16="http://schemas.microsoft.com/office/drawing/2014/main" id="{87CDC7AB-EEA8-1683-4FBB-2011E1688D00}"/>
+              </a:ext>
+            </a:extLst>
+          </p:cNvPr>
+          <p:cNvSpPr txBox="1">
+            <a:spLocks/>
+          </p:cNvSpPr>
+          <p:nvPr/>
+        </p:nvSpPr>
+        <p:spPr>
+          <a:xfrm>
+            <a:off x="4286250" y="1825625"/>
+            <a:ext cx="3028950" cy="1155700"/>
+          </a:xfrm>
+          <a:prstGeom prst="rect">
+            <a:avLst/>
+          </a:prstGeom>
+        </p:spPr>
+        <p:txBody>
+          <a:bodyPr vert="horz" lIns="91440" tIns="45720" rIns="91440" bIns="45720" rtlCol="0">
+            <a:normAutofit/>
+          </a:bodyPr>
+          <a:lstStyle>
+            <a:lvl1pPr marL="228600" indent="-228600" algn="l" defTabSz="914400" rtl="0" eaLnBrk="1" latinLnBrk="0" hangingPunct="1">
+              <a:lnSpc>
+                <a:spcPct val="90000"/>
+              </a:lnSpc>
+              <a:spcBef>
+                <a:spcPts val="1000"/>
+              </a:spcBef>
+              <a:buFont typeface="Arial" panose="020B0604020202020204" pitchFamily="34" charset="0"/>
+              <a:buChar char="•"/>
+              <a:defRPr sz="2800" kern="1200">
+                <a:solidFill>
+                  <a:schemeClr val="bg1"/>
+                </a:solidFill>
+                <a:latin typeface="+mn-lt"/>
+                <a:ea typeface="+mn-ea"/>
+                <a:cs typeface="+mn-cs"/>
+              </a:defRPr>
+            </a:lvl1pPr>
+            <a:lvl2pPr marL="685800" indent="-228600" algn="l" defTabSz="914400" rtl="0" eaLnBrk="1" latinLnBrk="0" hangingPunct="1">
+              <a:lnSpc>
+                <a:spcPct val="90000"/>
+              </a:lnSpc>
+              <a:spcBef>
+                <a:spcPts val="500"/>
+              </a:spcBef>
+              <a:buFont typeface="Arial" panose="020B0604020202020204" pitchFamily="34" charset="0"/>
+              <a:buChar char="•"/>
+              <a:defRPr sz="2400" kern="1200">
+                <a:solidFill>
+                  <a:schemeClr val="bg1"/>
+                </a:solidFill>
+                <a:latin typeface="+mn-lt"/>
+                <a:ea typeface="+mn-ea"/>
+                <a:cs typeface="+mn-cs"/>
+              </a:defRPr>
+            </a:lvl2pPr>
+            <a:lvl3pPr marL="1143000" indent="-228600" algn="l" defTabSz="914400" rtl="0" eaLnBrk="1" latinLnBrk="0" hangingPunct="1">
+              <a:lnSpc>
+                <a:spcPct val="90000"/>
+              </a:lnSpc>
+              <a:spcBef>
+                <a:spcPts val="500"/>
+              </a:spcBef>
+              <a:buFont typeface="Arial" panose="020B0604020202020204" pitchFamily="34" charset="0"/>
+              <a:buChar char="•"/>
+              <a:defRPr sz="2000" kern="1200">
+                <a:solidFill>
+                  <a:schemeClr val="bg1"/>
+                </a:solidFill>
+                <a:latin typeface="+mn-lt"/>
+                <a:ea typeface="+mn-ea"/>
+                <a:cs typeface="+mn-cs"/>
+              </a:defRPr>
+            </a:lvl3pPr>
+            <a:lvl4pPr marL="1600200" indent="-228600" algn="l" defTabSz="914400" rtl="0" eaLnBrk="1" latinLnBrk="0" hangingPunct="1">
+              <a:lnSpc>
+                <a:spcPct val="90000"/>
+              </a:lnSpc>
+              <a:spcBef>
+                <a:spcPts val="500"/>
+              </a:spcBef>
+              <a:buFont typeface="Arial" panose="020B0604020202020204" pitchFamily="34" charset="0"/>
+              <a:buChar char="•"/>
+              <a:defRPr sz="1800" kern="1200">
+                <a:solidFill>
+                  <a:schemeClr val="bg1"/>
+                </a:solidFill>
+                <a:latin typeface="+mn-lt"/>
+                <a:ea typeface="+mn-ea"/>
+                <a:cs typeface="+mn-cs"/>
+              </a:defRPr>
+            </a:lvl4pPr>
+            <a:lvl5pPr marL="2057400" indent="-228600" algn="l" defTabSz="914400" rtl="0" eaLnBrk="1" latinLnBrk="0" hangingPunct="1">
+              <a:lnSpc>
+                <a:spcPct val="90000"/>
+              </a:lnSpc>
+              <a:spcBef>
+                <a:spcPts val="500"/>
+              </a:spcBef>
+              <a:buFont typeface="Arial" panose="020B0604020202020204" pitchFamily="34" charset="0"/>
+              <a:buChar char="•"/>
+              <a:defRPr sz="1800" kern="1200">
+                <a:solidFill>
+                  <a:schemeClr val="bg1"/>
+                </a:solidFill>
+                <a:latin typeface="+mn-lt"/>
+                <a:ea typeface="+mn-ea"/>
+                <a:cs typeface="+mn-cs"/>
+              </a:defRPr>
+            </a:lvl5pPr>
+            <a:lvl6pPr marL="2514600" indent="-228600" algn="l" defTabSz="914400" rtl="0" eaLnBrk="1" latinLnBrk="0" hangingPunct="1">
+              <a:lnSpc>
+                <a:spcPct val="90000"/>
+              </a:lnSpc>
+              <a:spcBef>
+                <a:spcPts val="500"/>
+              </a:spcBef>
+              <a:buFont typeface="Arial" panose="020B0604020202020204" pitchFamily="34" charset="0"/>
+              <a:buChar char="•"/>
+              <a:defRPr sz="1800" kern="1200">
+                <a:solidFill>
+                  <a:schemeClr val="tx1"/>
+                </a:solidFill>
+                <a:latin typeface="+mn-lt"/>
+                <a:ea typeface="+mn-ea"/>
+                <a:cs typeface="+mn-cs"/>
+              </a:defRPr>
+            </a:lvl6pPr>
+            <a:lvl7pPr marL="2971800" indent="-228600" algn="l" defTabSz="914400" rtl="0" eaLnBrk="1" latinLnBrk="0" hangingPunct="1">
+              <a:lnSpc>
+                <a:spcPct val="90000"/>
+              </a:lnSpc>
+              <a:spcBef>
+                <a:spcPts val="500"/>
+              </a:spcBef>
+              <a:buFont typeface="Arial" panose="020B0604020202020204" pitchFamily="34" charset="0"/>
+              <a:buChar char="•"/>
+              <a:defRPr sz="1800" kern="1200">
+                <a:solidFill>
+                  <a:schemeClr val="tx1"/>
+                </a:solidFill>
+                <a:latin typeface="+mn-lt"/>
+                <a:ea typeface="+mn-ea"/>
+                <a:cs typeface="+mn-cs"/>
+              </a:defRPr>
+            </a:lvl7pPr>
+            <a:lvl8pPr marL="3429000" indent="-228600" algn="l" defTabSz="914400" rtl="0" eaLnBrk="1" latinLnBrk="0" hangingPunct="1">
+              <a:lnSpc>
+                <a:spcPct val="90000"/>
+              </a:lnSpc>
+              <a:spcBef>
+                <a:spcPts val="500"/>
+              </a:spcBef>
+              <a:buFont typeface="Arial" panose="020B0604020202020204" pitchFamily="34" charset="0"/>
+              <a:buChar char="•"/>
+              <a:defRPr sz="1800" kern="1200">
+                <a:solidFill>
+                  <a:schemeClr val="tx1"/>
+                </a:solidFill>
+                <a:latin typeface="+mn-lt"/>
+                <a:ea typeface="+mn-ea"/>
+                <a:cs typeface="+mn-cs"/>
+              </a:defRPr>
+            </a:lvl8pPr>
+            <a:lvl9pPr marL="3886200" indent="-228600" algn="l" defTabSz="914400" rtl="0" eaLnBrk="1" latinLnBrk="0" hangingPunct="1">
+              <a:lnSpc>
+                <a:spcPct val="90000"/>
+              </a:lnSpc>
+              <a:spcBef>
+                <a:spcPts val="500"/>
+              </a:spcBef>
+              <a:buFont typeface="Arial" panose="020B0604020202020204" pitchFamily="34" charset="0"/>
+              <a:buChar char="•"/>
+              <a:defRPr sz="1800" kern="1200">
+                <a:solidFill>
+                  <a:schemeClr val="tx1"/>
+                </a:solidFill>
+                <a:latin typeface="+mn-lt"/>
+                <a:ea typeface="+mn-ea"/>
+                <a:cs typeface="+mn-cs"/>
+              </a:defRPr>
+            </a:lvl9pPr>
+          </a:lstStyle>
+          <a:p>
+            <a:pPr marL="0" indent="0" algn="ctr">
+              <a:buFont typeface="Arial" panose="020B0604020202020204" pitchFamily="34" charset="0"/>
+              <a:buNone/>
+            </a:pPr>
+            <a:r>
+              <a:rPr lang="hu-HU" b="1" dirty="0" err="1"/>
+              <a:t>Github</a:t>
+            </a:r>
+            <a:endParaRPr lang="hu-HU" b="1" dirty="0"/>
+          </a:p>
+          <a:p>
+            <a:pPr marL="0" indent="0" algn="ctr">
+              <a:buFont typeface="Arial" panose="020B0604020202020204" pitchFamily="34" charset="0"/>
+              <a:buNone/>
+            </a:pPr>
+            <a:r>
+              <a:rPr lang="hu-HU" sz="2000" dirty="0"/>
+              <a:t>Version management</a:t>
+            </a:r>
+          </a:p>
+        </p:txBody>
+      </p:sp>
+      <p:sp>
+        <p:nvSpPr>
+          <p:cNvPr id="6" name="Tartalom helye 2">
+            <a:extLst>
+              <a:ext uri="{FF2B5EF4-FFF2-40B4-BE49-F238E27FC236}">
+                <a16:creationId xmlns:a16="http://schemas.microsoft.com/office/drawing/2014/main" id="{ABAB9F28-65FC-B0F0-F275-8437CA7BA9E3}"/>
+              </a:ext>
+            </a:extLst>
+          </p:cNvPr>
+          <p:cNvSpPr txBox="1">
+            <a:spLocks/>
+          </p:cNvSpPr>
+          <p:nvPr/>
+        </p:nvSpPr>
+        <p:spPr>
+          <a:xfrm>
+            <a:off x="7010400" y="3987800"/>
+            <a:ext cx="3028950" cy="1155700"/>
+          </a:xfrm>
+          <a:prstGeom prst="rect">
+            <a:avLst/>
+          </a:prstGeom>
+        </p:spPr>
+        <p:txBody>
+          <a:bodyPr vert="horz" lIns="91440" tIns="45720" rIns="91440" bIns="45720" rtlCol="0">
+            <a:normAutofit/>
+          </a:bodyPr>
+          <a:lstStyle>
+            <a:lvl1pPr marL="228600" indent="-228600" algn="l" defTabSz="914400" rtl="0" eaLnBrk="1" latinLnBrk="0" hangingPunct="1">
+              <a:lnSpc>
+                <a:spcPct val="90000"/>
+              </a:lnSpc>
+              <a:spcBef>
+                <a:spcPts val="1000"/>
+              </a:spcBef>
+              <a:buFont typeface="Arial" panose="020B0604020202020204" pitchFamily="34" charset="0"/>
+              <a:buChar char="•"/>
+              <a:defRPr sz="2800" kern="1200">
+                <a:solidFill>
+                  <a:schemeClr val="bg1"/>
+                </a:solidFill>
+                <a:latin typeface="+mn-lt"/>
+                <a:ea typeface="+mn-ea"/>
+                <a:cs typeface="+mn-cs"/>
+              </a:defRPr>
+            </a:lvl1pPr>
+            <a:lvl2pPr marL="685800" indent="-228600" algn="l" defTabSz="914400" rtl="0" eaLnBrk="1" latinLnBrk="0" hangingPunct="1">
+              <a:lnSpc>
+                <a:spcPct val="90000"/>
+              </a:lnSpc>
+              <a:spcBef>
+                <a:spcPts val="500"/>
+              </a:spcBef>
+              <a:buFont typeface="Arial" panose="020B0604020202020204" pitchFamily="34" charset="0"/>
+              <a:buChar char="•"/>
+              <a:defRPr sz="2400" kern="1200">
+                <a:solidFill>
+                  <a:schemeClr val="bg1"/>
+                </a:solidFill>
+                <a:latin typeface="+mn-lt"/>
+                <a:ea typeface="+mn-ea"/>
+                <a:cs typeface="+mn-cs"/>
+              </a:defRPr>
+            </a:lvl2pPr>
+            <a:lvl3pPr marL="1143000" indent="-228600" algn="l" defTabSz="914400" rtl="0" eaLnBrk="1" latinLnBrk="0" hangingPunct="1">
+              <a:lnSpc>
+                <a:spcPct val="90000"/>
+              </a:lnSpc>
+              <a:spcBef>
+                <a:spcPts val="500"/>
+              </a:spcBef>
+              <a:buFont typeface="Arial" panose="020B0604020202020204" pitchFamily="34" charset="0"/>
+              <a:buChar char="•"/>
+              <a:defRPr sz="2000" kern="1200">
+                <a:solidFill>
+                  <a:schemeClr val="bg1"/>
+                </a:solidFill>
+                <a:latin typeface="+mn-lt"/>
+                <a:ea typeface="+mn-ea"/>
+                <a:cs typeface="+mn-cs"/>
+              </a:defRPr>
+            </a:lvl3pPr>
+            <a:lvl4pPr marL="1600200" indent="-228600" algn="l" defTabSz="914400" rtl="0" eaLnBrk="1" latinLnBrk="0" hangingPunct="1">
+              <a:lnSpc>
+                <a:spcPct val="90000"/>
+              </a:lnSpc>
+              <a:spcBef>
+                <a:spcPts val="500"/>
+              </a:spcBef>
+              <a:buFont typeface="Arial" panose="020B0604020202020204" pitchFamily="34" charset="0"/>
+              <a:buChar char="•"/>
+              <a:defRPr sz="1800" kern="1200">
+                <a:solidFill>
+                  <a:schemeClr val="bg1"/>
+                </a:solidFill>
+                <a:latin typeface="+mn-lt"/>
+                <a:ea typeface="+mn-ea"/>
+                <a:cs typeface="+mn-cs"/>
+              </a:defRPr>
+            </a:lvl4pPr>
+            <a:lvl5pPr marL="2057400" indent="-228600" algn="l" defTabSz="914400" rtl="0" eaLnBrk="1" latinLnBrk="0" hangingPunct="1">
+              <a:lnSpc>
+                <a:spcPct val="90000"/>
+              </a:lnSpc>
+              <a:spcBef>
+                <a:spcPts val="500"/>
+              </a:spcBef>
+              <a:buFont typeface="Arial" panose="020B0604020202020204" pitchFamily="34" charset="0"/>
+              <a:buChar char="•"/>
+              <a:defRPr sz="1800" kern="1200">
+                <a:solidFill>
+                  <a:schemeClr val="bg1"/>
+                </a:solidFill>
+                <a:latin typeface="+mn-lt"/>
+                <a:ea typeface="+mn-ea"/>
+                <a:cs typeface="+mn-cs"/>
+              </a:defRPr>
+            </a:lvl5pPr>
+            <a:lvl6pPr marL="2514600" indent="-228600" algn="l" defTabSz="914400" rtl="0" eaLnBrk="1" latinLnBrk="0" hangingPunct="1">
+              <a:lnSpc>
+                <a:spcPct val="90000"/>
+              </a:lnSpc>
+              <a:spcBef>
+                <a:spcPts val="500"/>
+              </a:spcBef>
+              <a:buFont typeface="Arial" panose="020B0604020202020204" pitchFamily="34" charset="0"/>
+              <a:buChar char="•"/>
+              <a:defRPr sz="1800" kern="1200">
+                <a:solidFill>
+                  <a:schemeClr val="tx1"/>
+                </a:solidFill>
+                <a:latin typeface="+mn-lt"/>
+                <a:ea typeface="+mn-ea"/>
+                <a:cs typeface="+mn-cs"/>
+              </a:defRPr>
+            </a:lvl6pPr>
+            <a:lvl7pPr marL="2971800" indent="-228600" algn="l" defTabSz="914400" rtl="0" eaLnBrk="1" latinLnBrk="0" hangingPunct="1">
+              <a:lnSpc>
+                <a:spcPct val="90000"/>
+              </a:lnSpc>
+              <a:spcBef>
+                <a:spcPts val="500"/>
+              </a:spcBef>
+              <a:buFont typeface="Arial" panose="020B0604020202020204" pitchFamily="34" charset="0"/>
+              <a:buChar char="•"/>
+              <a:defRPr sz="1800" kern="1200">
+                <a:solidFill>
+                  <a:schemeClr val="tx1"/>
+                </a:solidFill>
+                <a:latin typeface="+mn-lt"/>
+                <a:ea typeface="+mn-ea"/>
+                <a:cs typeface="+mn-cs"/>
+              </a:defRPr>
+            </a:lvl7pPr>
+            <a:lvl8pPr marL="3429000" indent="-228600" algn="l" defTabSz="914400" rtl="0" eaLnBrk="1" latinLnBrk="0" hangingPunct="1">
+              <a:lnSpc>
+                <a:spcPct val="90000"/>
+              </a:lnSpc>
+              <a:spcBef>
+                <a:spcPts val="500"/>
+              </a:spcBef>
+              <a:buFont typeface="Arial" panose="020B0604020202020204" pitchFamily="34" charset="0"/>
+              <a:buChar char="•"/>
+              <a:defRPr sz="1800" kern="1200">
+                <a:solidFill>
+                  <a:schemeClr val="tx1"/>
+                </a:solidFill>
+                <a:latin typeface="+mn-lt"/>
+                <a:ea typeface="+mn-ea"/>
+                <a:cs typeface="+mn-cs"/>
+              </a:defRPr>
+            </a:lvl8pPr>
+            <a:lvl9pPr marL="3886200" indent="-228600" algn="l" defTabSz="914400" rtl="0" eaLnBrk="1" latinLnBrk="0" hangingPunct="1">
+              <a:lnSpc>
+                <a:spcPct val="90000"/>
+              </a:lnSpc>
+              <a:spcBef>
+                <a:spcPts val="500"/>
+              </a:spcBef>
+              <a:buFont typeface="Arial" panose="020B0604020202020204" pitchFamily="34" charset="0"/>
+              <a:buChar char="•"/>
+              <a:defRPr sz="1800" kern="1200">
+                <a:solidFill>
+                  <a:schemeClr val="tx1"/>
+                </a:solidFill>
+                <a:latin typeface="+mn-lt"/>
+                <a:ea typeface="+mn-ea"/>
+                <a:cs typeface="+mn-cs"/>
+              </a:defRPr>
+            </a:lvl9pPr>
+          </a:lstStyle>
+          <a:p>
+            <a:pPr marL="0" indent="0" algn="ctr">
+              <a:buFont typeface="Arial" panose="020B0604020202020204" pitchFamily="34" charset="0"/>
+              <a:buNone/>
+            </a:pPr>
+            <a:r>
+              <a:rPr lang="hu-HU" b="1" dirty="0" err="1"/>
+              <a:t>Discord</a:t>
+            </a:r>
+            <a:endParaRPr lang="hu-HU" b="1" dirty="0"/>
+          </a:p>
+          <a:p>
+            <a:pPr marL="0" indent="0" algn="ctr">
+              <a:buFont typeface="Arial" panose="020B0604020202020204" pitchFamily="34" charset="0"/>
+              <a:buNone/>
+            </a:pPr>
+            <a:r>
+              <a:rPr lang="hu-HU" sz="2000" dirty="0" err="1"/>
+              <a:t>Communication</a:t>
+            </a:r>
+            <a:endParaRPr lang="hu-HU" sz="2000" dirty="0"/>
+          </a:p>
+        </p:txBody>
+      </p:sp>
+    </p:spTree>
+    <p:extLst>
+      <p:ext uri="{BB962C8B-B14F-4D97-AF65-F5344CB8AC3E}">
+        <p14:creationId xmlns:p14="http://schemas.microsoft.com/office/powerpoint/2010/main" val="618876090"/>
+      </p:ext>
+    </p:extLst>
+  </p:cSld>
+  <p:clrMapOvr>
+    <a:masterClrMapping/>
+  </p:clrMapOvr>
+  <p:transition spd="slow">
+    <p:push dir="u"/>
+  </p:transition>
+</p:sld>
+</file>
+
+<file path=ppt/slides/slide6.xml><?xml version="1.0" encoding="utf-8"?>
 <p:sld xmlns:a="http://schemas.openxmlformats.org/drawingml/2006/main" xmlns:r="http://schemas.openxmlformats.org/officeDocument/2006/relationships" xmlns:p="http://schemas.openxmlformats.org/presentationml/2006/main">
   <p:cSld>
     <p:spTree>
@@ -4711,45 +6507,85 @@
           <a:p>
             <a:pPr algn="just"/>
             <a:r>
-              <a:rPr lang="hu-HU" dirty="0" err="1"/>
+              <a:rPr lang="hu-HU" dirty="0" err="1">
+                <a:solidFill>
+                  <a:schemeClr val="bg1"/>
+                </a:solidFill>
+              </a:rPr>
               <a:t>Favourites</a:t>
             </a:r>
             <a:r>
-              <a:rPr lang="hu-HU" dirty="0"/>
+              <a:rPr lang="hu-HU" dirty="0">
+                <a:solidFill>
+                  <a:schemeClr val="bg1"/>
+                </a:solidFill>
+              </a:rPr>
               <a:t> design</a:t>
             </a:r>
           </a:p>
           <a:p>
             <a:pPr algn="just"/>
             <a:r>
-              <a:rPr lang="hu-HU" dirty="0" err="1"/>
+              <a:rPr lang="hu-HU" dirty="0" err="1">
+                <a:solidFill>
+                  <a:schemeClr val="bg1"/>
+                </a:solidFill>
+              </a:rPr>
               <a:t>Navbar</a:t>
             </a:r>
-            <a:endParaRPr lang="hu-HU" dirty="0"/>
+            <a:endParaRPr lang="hu-HU" dirty="0">
+              <a:solidFill>
+                <a:schemeClr val="bg1"/>
+              </a:solidFill>
+            </a:endParaRPr>
           </a:p>
           <a:p>
             <a:pPr algn="just"/>
             <a:r>
-              <a:rPr lang="hu-HU" dirty="0" err="1"/>
+              <a:rPr lang="hu-HU" dirty="0" err="1">
+                <a:solidFill>
+                  <a:schemeClr val="bg1"/>
+                </a:solidFill>
+              </a:rPr>
               <a:t>Item</a:t>
             </a:r>
             <a:r>
-              <a:rPr lang="hu-HU" dirty="0"/>
+              <a:rPr lang="hu-HU" dirty="0">
+                <a:solidFill>
+                  <a:schemeClr val="bg1"/>
+                </a:solidFill>
+              </a:rPr>
               <a:t> </a:t>
             </a:r>
             <a:r>
-              <a:rPr lang="hu-HU" dirty="0" err="1"/>
+              <a:rPr lang="hu-HU" dirty="0" err="1">
+                <a:solidFill>
+                  <a:schemeClr val="bg1"/>
+                </a:solidFill>
+              </a:rPr>
               <a:t>detail</a:t>
             </a:r>
             <a:r>
-              <a:rPr lang="hu-HU" dirty="0"/>
+              <a:rPr lang="hu-HU" dirty="0">
+                <a:solidFill>
+                  <a:schemeClr val="bg1"/>
+                </a:solidFill>
+              </a:rPr>
               <a:t>, </a:t>
             </a:r>
             <a:r>
-              <a:rPr lang="hu-HU" dirty="0" err="1"/>
+              <a:rPr lang="hu-HU" dirty="0" err="1">
+                <a:solidFill>
+                  <a:schemeClr val="bg1"/>
+                </a:solidFill>
+              </a:rPr>
               <a:t>edit</a:t>
             </a:r>
-            <a:endParaRPr lang="hu-HU" dirty="0"/>
+            <a:endParaRPr lang="hu-HU" dirty="0">
+              <a:solidFill>
+                <a:schemeClr val="bg1"/>
+              </a:solidFill>
+            </a:endParaRPr>
           </a:p>
           <a:p>
             <a:endParaRPr lang="hu-HU" dirty="0"/>
@@ -4786,7 +6622,11 @@
           <a:p>
             <a:pPr algn="ctr"/>
             <a:r>
-              <a:rPr lang="hu-HU" dirty="0"/>
+              <a:rPr lang="hu-HU" dirty="0">
+                <a:solidFill>
+                  <a:schemeClr val="bg1"/>
+                </a:solidFill>
+              </a:rPr>
               <a:t>Backend</a:t>
             </a:r>
           </a:p>
@@ -4822,7 +6662,11 @@
           <a:p>
             <a:pPr algn="ctr"/>
             <a:r>
-              <a:rPr lang="hu-HU" dirty="0"/>
+              <a:rPr lang="hu-HU" dirty="0">
+                <a:solidFill>
+                  <a:schemeClr val="bg1"/>
+                </a:solidFill>
+              </a:rPr>
               <a:t>Frontend</a:t>
             </a:r>
           </a:p>
@@ -5028,7 +6872,7 @@
 </p:sld>
 </file>
 
-<file path=ppt/slides/slide4.xml><?xml version="1.0" encoding="utf-8"?>
+<file path=ppt/slides/slide7.xml><?xml version="1.0" encoding="utf-8"?>
 <p:sld xmlns:a="http://schemas.openxmlformats.org/drawingml/2006/main" xmlns:r="http://schemas.openxmlformats.org/officeDocument/2006/relationships" xmlns:p="http://schemas.openxmlformats.org/presentationml/2006/main">
   <p:cSld>
     <p:spTree>
@@ -5356,22 +7200,38 @@
           <a:p>
             <a:pPr algn="just"/>
             <a:r>
-              <a:rPr lang="hu-HU" dirty="0" err="1"/>
+              <a:rPr lang="hu-HU" dirty="0" err="1">
+                <a:solidFill>
+                  <a:schemeClr val="bg1"/>
+                </a:solidFill>
+              </a:rPr>
               <a:t>Notifications</a:t>
             </a:r>
             <a:r>
-              <a:rPr lang="hu-HU" dirty="0"/>
+              <a:rPr lang="hu-HU" dirty="0">
+                <a:solidFill>
+                  <a:schemeClr val="bg1"/>
+                </a:solidFill>
+              </a:rPr>
               <a:t> design</a:t>
             </a:r>
           </a:p>
           <a:p>
             <a:pPr algn="just"/>
             <a:r>
-              <a:rPr lang="hu-HU" dirty="0" err="1"/>
+              <a:rPr lang="hu-HU" dirty="0" err="1">
+                <a:solidFill>
+                  <a:schemeClr val="bg1"/>
+                </a:solidFill>
+              </a:rPr>
               <a:t>Messages</a:t>
             </a:r>
             <a:r>
-              <a:rPr lang="hu-HU" dirty="0"/>
+              <a:rPr lang="hu-HU" dirty="0">
+                <a:solidFill>
+                  <a:schemeClr val="bg1"/>
+                </a:solidFill>
+              </a:rPr>
               <a:t> design</a:t>
             </a:r>
           </a:p>
@@ -5407,7 +7267,11 @@
           <a:p>
             <a:pPr algn="ctr"/>
             <a:r>
-              <a:rPr lang="hu-HU" dirty="0"/>
+              <a:rPr lang="hu-HU" dirty="0">
+                <a:solidFill>
+                  <a:schemeClr val="bg1"/>
+                </a:solidFill>
+              </a:rPr>
               <a:t>Backend</a:t>
             </a:r>
           </a:p>
@@ -5443,7 +7307,11 @@
           <a:p>
             <a:pPr algn="ctr"/>
             <a:r>
-              <a:rPr lang="hu-HU" dirty="0"/>
+              <a:rPr lang="hu-HU" dirty="0">
+                <a:solidFill>
+                  <a:schemeClr val="bg1"/>
+                </a:solidFill>
+              </a:rPr>
               <a:t>Frontend</a:t>
             </a:r>
           </a:p>
@@ -5572,7 +7440,7 @@
 </p:sld>
 </file>
 
-<file path=ppt/slides/slide5.xml><?xml version="1.0" encoding="utf-8"?>
+<file path=ppt/slides/slide8.xml><?xml version="1.0" encoding="utf-8"?>
 <p:sld xmlns:a="http://schemas.openxmlformats.org/drawingml/2006/main" xmlns:r="http://schemas.openxmlformats.org/officeDocument/2006/relationships" xmlns:p="http://schemas.openxmlformats.org/presentationml/2006/main">
   <p:cSld>
     <p:spTree>

--- a/docs/Bellora.pptx
+++ b/docs/Bellora.pptx
@@ -204,7 +204,7 @@
           <a:p>
             <a:fld id="{7368D833-244B-4ADB-AE91-8A49E86CB26D}" type="datetimeFigureOut">
               <a:rPr lang="hu-HU" smtClean="0"/>
-              <a:t>2026. 04. 21.</a:t>
+              <a:t>2026. 04. 22.</a:t>
             </a:fld>
             <a:endParaRPr lang="hu-HU"/>
           </a:p>
@@ -714,7 +714,7 @@
           <a:p>
             <a:fld id="{AA4C53F9-DAF1-4795-BE70-D200669F1F02}" type="datetimeFigureOut">
               <a:rPr lang="hu-HU" smtClean="0"/>
-              <a:t>2026. 04. 21.</a:t>
+              <a:t>2026. 04. 22.</a:t>
             </a:fld>
             <a:endParaRPr lang="hu-HU"/>
           </a:p>
@@ -784,6 +784,18 @@
   <p:clrMapOvr>
     <a:masterClrMapping/>
   </p:clrMapOvr>
+  <mc:AlternateContent xmlns:mc="http://schemas.openxmlformats.org/markup-compatibility/2006">
+    <mc:Choice xmlns:p14="http://schemas.microsoft.com/office/powerpoint/2010/main" Requires="p14">
+      <p:transition spd="slow" p14:dur="1600">
+        <p14:prism isContent="1" isInverted="1"/>
+      </p:transition>
+    </mc:Choice>
+    <mc:Fallback>
+      <p:transition spd="slow">
+        <p:fade/>
+      </p:transition>
+    </mc:Fallback>
+  </mc:AlternateContent>
 </p:sldLayout>
 </file>
 
@@ -912,7 +924,7 @@
           <a:p>
             <a:fld id="{AA4C53F9-DAF1-4795-BE70-D200669F1F02}" type="datetimeFigureOut">
               <a:rPr lang="hu-HU" smtClean="0"/>
-              <a:t>2026. 04. 21.</a:t>
+              <a:t>2026. 04. 22.</a:t>
             </a:fld>
             <a:endParaRPr lang="hu-HU"/>
           </a:p>
@@ -982,6 +994,18 @@
   <p:clrMapOvr>
     <a:masterClrMapping/>
   </p:clrMapOvr>
+  <mc:AlternateContent xmlns:mc="http://schemas.openxmlformats.org/markup-compatibility/2006">
+    <mc:Choice xmlns:p14="http://schemas.microsoft.com/office/powerpoint/2010/main" Requires="p14">
+      <p:transition spd="slow" p14:dur="1600">
+        <p14:prism isContent="1" isInverted="1"/>
+      </p:transition>
+    </mc:Choice>
+    <mc:Fallback>
+      <p:transition spd="slow">
+        <p:fade/>
+      </p:transition>
+    </mc:Fallback>
+  </mc:AlternateContent>
 </p:sldLayout>
 </file>
 
@@ -1120,7 +1144,7 @@
           <a:p>
             <a:fld id="{AA4C53F9-DAF1-4795-BE70-D200669F1F02}" type="datetimeFigureOut">
               <a:rPr lang="hu-HU" smtClean="0"/>
-              <a:t>2026. 04. 21.</a:t>
+              <a:t>2026. 04. 22.</a:t>
             </a:fld>
             <a:endParaRPr lang="hu-HU"/>
           </a:p>
@@ -1190,6 +1214,18 @@
   <p:clrMapOvr>
     <a:masterClrMapping/>
   </p:clrMapOvr>
+  <mc:AlternateContent xmlns:mc="http://schemas.openxmlformats.org/markup-compatibility/2006">
+    <mc:Choice xmlns:p14="http://schemas.microsoft.com/office/powerpoint/2010/main" Requires="p14">
+      <p:transition spd="slow" p14:dur="1600">
+        <p14:prism isContent="1" isInverted="1"/>
+      </p:transition>
+    </mc:Choice>
+    <mc:Fallback>
+      <p:transition spd="slow">
+        <p:fade/>
+      </p:transition>
+    </mc:Fallback>
+  </mc:AlternateContent>
 </p:sldLayout>
 </file>
 
@@ -1318,7 +1354,7 @@
           <a:p>
             <a:fld id="{AA4C53F9-DAF1-4795-BE70-D200669F1F02}" type="datetimeFigureOut">
               <a:rPr lang="hu-HU" smtClean="0"/>
-              <a:t>2026. 04. 21.</a:t>
+              <a:t>2026. 04. 22.</a:t>
             </a:fld>
             <a:endParaRPr lang="hu-HU"/>
           </a:p>
@@ -1388,9 +1424,18 @@
   <p:clrMapOvr>
     <a:masterClrMapping/>
   </p:clrMapOvr>
-  <p:transition spd="slow">
-    <p:push dir="u"/>
-  </p:transition>
+  <mc:AlternateContent xmlns:mc="http://schemas.openxmlformats.org/markup-compatibility/2006">
+    <mc:Choice xmlns:p14="http://schemas.microsoft.com/office/powerpoint/2010/main" Requires="p14">
+      <p:transition spd="slow" p14:dur="1600">
+        <p14:prism isContent="1" isInverted="1"/>
+      </p:transition>
+    </mc:Choice>
+    <mc:Fallback>
+      <p:transition spd="slow">
+        <p:fade/>
+      </p:transition>
+    </mc:Fallback>
+  </mc:AlternateContent>
 </p:sldLayout>
 </file>
 
@@ -1596,7 +1641,7 @@
           <a:p>
             <a:fld id="{AA4C53F9-DAF1-4795-BE70-D200669F1F02}" type="datetimeFigureOut">
               <a:rPr lang="hu-HU" smtClean="0"/>
-              <a:t>2026. 04. 21.</a:t>
+              <a:t>2026. 04. 22.</a:t>
             </a:fld>
             <a:endParaRPr lang="hu-HU"/>
           </a:p>
@@ -1666,6 +1711,18 @@
   <p:clrMapOvr>
     <a:masterClrMapping/>
   </p:clrMapOvr>
+  <mc:AlternateContent xmlns:mc="http://schemas.openxmlformats.org/markup-compatibility/2006">
+    <mc:Choice xmlns:p14="http://schemas.microsoft.com/office/powerpoint/2010/main" Requires="p14">
+      <p:transition spd="slow" p14:dur="1600">
+        <p14:prism isContent="1" isInverted="1"/>
+      </p:transition>
+    </mc:Choice>
+    <mc:Fallback>
+      <p:transition spd="slow">
+        <p:fade/>
+      </p:transition>
+    </mc:Fallback>
+  </mc:AlternateContent>
 </p:sldLayout>
 </file>
 
@@ -1861,7 +1918,7 @@
           <a:p>
             <a:fld id="{AA4C53F9-DAF1-4795-BE70-D200669F1F02}" type="datetimeFigureOut">
               <a:rPr lang="hu-HU" smtClean="0"/>
-              <a:t>2026. 04. 21.</a:t>
+              <a:t>2026. 04. 22.</a:t>
             </a:fld>
             <a:endParaRPr lang="hu-HU"/>
           </a:p>
@@ -1931,6 +1988,18 @@
   <p:clrMapOvr>
     <a:masterClrMapping/>
   </p:clrMapOvr>
+  <mc:AlternateContent xmlns:mc="http://schemas.openxmlformats.org/markup-compatibility/2006">
+    <mc:Choice xmlns:p14="http://schemas.microsoft.com/office/powerpoint/2010/main" Requires="p14">
+      <p:transition spd="slow" p14:dur="1600">
+        <p14:prism isContent="1" isInverted="1"/>
+      </p:transition>
+    </mc:Choice>
+    <mc:Fallback>
+      <p:transition spd="slow">
+        <p:fade/>
+      </p:transition>
+    </mc:Fallback>
+  </mc:AlternateContent>
 </p:sldLayout>
 </file>
 
@@ -2273,7 +2342,7 @@
           <a:p>
             <a:fld id="{AA4C53F9-DAF1-4795-BE70-D200669F1F02}" type="datetimeFigureOut">
               <a:rPr lang="hu-HU" smtClean="0"/>
-              <a:t>2026. 04. 21.</a:t>
+              <a:t>2026. 04. 22.</a:t>
             </a:fld>
             <a:endParaRPr lang="hu-HU"/>
           </a:p>
@@ -2343,6 +2412,18 @@
   <p:clrMapOvr>
     <a:masterClrMapping/>
   </p:clrMapOvr>
+  <mc:AlternateContent xmlns:mc="http://schemas.openxmlformats.org/markup-compatibility/2006">
+    <mc:Choice xmlns:p14="http://schemas.microsoft.com/office/powerpoint/2010/main" Requires="p14">
+      <p:transition spd="slow" p14:dur="1600">
+        <p14:prism isContent="1" isInverted="1"/>
+      </p:transition>
+    </mc:Choice>
+    <mc:Fallback>
+      <p:transition spd="slow">
+        <p:fade/>
+      </p:transition>
+    </mc:Fallback>
+  </mc:AlternateContent>
 </p:sldLayout>
 </file>
 
@@ -2414,7 +2495,7 @@
           <a:p>
             <a:fld id="{AA4C53F9-DAF1-4795-BE70-D200669F1F02}" type="datetimeFigureOut">
               <a:rPr lang="hu-HU" smtClean="0"/>
-              <a:t>2026. 04. 21.</a:t>
+              <a:t>2026. 04. 22.</a:t>
             </a:fld>
             <a:endParaRPr lang="hu-HU"/>
           </a:p>
@@ -2484,6 +2565,18 @@
   <p:clrMapOvr>
     <a:masterClrMapping/>
   </p:clrMapOvr>
+  <mc:AlternateContent xmlns:mc="http://schemas.openxmlformats.org/markup-compatibility/2006">
+    <mc:Choice xmlns:p14="http://schemas.microsoft.com/office/powerpoint/2010/main" Requires="p14">
+      <p:transition spd="slow" p14:dur="1600">
+        <p14:prism isContent="1" isInverted="1"/>
+      </p:transition>
+    </mc:Choice>
+    <mc:Fallback>
+      <p:transition spd="slow">
+        <p:fade/>
+      </p:transition>
+    </mc:Fallback>
+  </mc:AlternateContent>
 </p:sldLayout>
 </file>
 
@@ -2527,7 +2620,7 @@
           <a:p>
             <a:fld id="{AA4C53F9-DAF1-4795-BE70-D200669F1F02}" type="datetimeFigureOut">
               <a:rPr lang="hu-HU" smtClean="0"/>
-              <a:t>2026. 04. 21.</a:t>
+              <a:t>2026. 04. 22.</a:t>
             </a:fld>
             <a:endParaRPr lang="hu-HU"/>
           </a:p>
@@ -2597,6 +2690,18 @@
   <p:clrMapOvr>
     <a:masterClrMapping/>
   </p:clrMapOvr>
+  <mc:AlternateContent xmlns:mc="http://schemas.openxmlformats.org/markup-compatibility/2006">
+    <mc:Choice xmlns:p14="http://schemas.microsoft.com/office/powerpoint/2010/main" Requires="p14">
+      <p:transition spd="slow" p14:dur="1600">
+        <p14:prism isContent="1" isInverted="1"/>
+      </p:transition>
+    </mc:Choice>
+    <mc:Fallback>
+      <p:transition spd="slow">
+        <p:fade/>
+      </p:transition>
+    </mc:Fallback>
+  </mc:AlternateContent>
 </p:sldLayout>
 </file>
 
@@ -2838,7 +2943,7 @@
           <a:p>
             <a:fld id="{AA4C53F9-DAF1-4795-BE70-D200669F1F02}" type="datetimeFigureOut">
               <a:rPr lang="hu-HU" smtClean="0"/>
-              <a:t>2026. 04. 21.</a:t>
+              <a:t>2026. 04. 22.</a:t>
             </a:fld>
             <a:endParaRPr lang="hu-HU"/>
           </a:p>
@@ -2908,6 +3013,18 @@
   <p:clrMapOvr>
     <a:masterClrMapping/>
   </p:clrMapOvr>
+  <mc:AlternateContent xmlns:mc="http://schemas.openxmlformats.org/markup-compatibility/2006">
+    <mc:Choice xmlns:p14="http://schemas.microsoft.com/office/powerpoint/2010/main" Requires="p14">
+      <p:transition spd="slow" p14:dur="1600">
+        <p14:prism isContent="1" isInverted="1"/>
+      </p:transition>
+    </mc:Choice>
+    <mc:Fallback>
+      <p:transition spd="slow">
+        <p:fade/>
+      </p:transition>
+    </mc:Fallback>
+  </mc:AlternateContent>
 </p:sldLayout>
 </file>
 
@@ -3126,7 +3243,7 @@
           <a:p>
             <a:fld id="{AA4C53F9-DAF1-4795-BE70-D200669F1F02}" type="datetimeFigureOut">
               <a:rPr lang="hu-HU" smtClean="0"/>
-              <a:t>2026. 04. 21.</a:t>
+              <a:t>2026. 04. 22.</a:t>
             </a:fld>
             <a:endParaRPr lang="hu-HU"/>
           </a:p>
@@ -3196,6 +3313,18 @@
   <p:clrMapOvr>
     <a:masterClrMapping/>
   </p:clrMapOvr>
+  <mc:AlternateContent xmlns:mc="http://schemas.openxmlformats.org/markup-compatibility/2006">
+    <mc:Choice xmlns:p14="http://schemas.microsoft.com/office/powerpoint/2010/main" Requires="p14">
+      <p:transition spd="slow" p14:dur="1600">
+        <p14:prism isContent="1" isInverted="1"/>
+      </p:transition>
+    </mc:Choice>
+    <mc:Fallback>
+      <p:transition spd="slow">
+        <p:fade/>
+      </p:transition>
+    </mc:Fallback>
+  </mc:AlternateContent>
 </p:sldLayout>
 </file>
 
@@ -3387,7 +3516,7 @@
           <a:p>
             <a:fld id="{AA4C53F9-DAF1-4795-BE70-D200669F1F02}" type="datetimeFigureOut">
               <a:rPr lang="hu-HU" smtClean="0"/>
-              <a:t>2026. 04. 21.</a:t>
+              <a:t>2026. 04. 22.</a:t>
             </a:fld>
             <a:endParaRPr lang="hu-HU"/>
           </a:p>
@@ -3504,6 +3633,18 @@
     <p:sldLayoutId id="2147483658" r:id="rId10"/>
     <p:sldLayoutId id="2147483659" r:id="rId11"/>
   </p:sldLayoutIdLst>
+  <mc:AlternateContent xmlns:mc="http://schemas.openxmlformats.org/markup-compatibility/2006">
+    <mc:Choice xmlns:p14="http://schemas.microsoft.com/office/powerpoint/2010/main" Requires="p14">
+      <p:transition spd="slow" p14:dur="1600">
+        <p14:prism isContent="1" isInverted="1"/>
+      </p:transition>
+    </mc:Choice>
+    <mc:Fallback>
+      <p:transition spd="slow">
+        <p:fade/>
+      </p:transition>
+    </mc:Fallback>
+  </mc:AlternateContent>
   <p:txStyles>
     <p:titleStyle>
       <a:lvl1pPr algn="l" defTabSz="914400" rtl="0" eaLnBrk="1" latinLnBrk="0" hangingPunct="1">
@@ -3806,6 +3947,58 @@
       </p:grpSpPr>
       <p:sp>
         <p:nvSpPr>
+          <p:cNvPr id="4" name="Téglalap: lekerekített 3">
+            <a:extLst>
+              <a:ext uri="{FF2B5EF4-FFF2-40B4-BE49-F238E27FC236}">
+                <a16:creationId xmlns:a16="http://schemas.microsoft.com/office/drawing/2014/main" id="{664F1866-F1F6-CB3B-6278-94F2E4F965DC}"/>
+              </a:ext>
+            </a:extLst>
+          </p:cNvPr>
+          <p:cNvSpPr/>
+          <p:nvPr/>
+        </p:nvSpPr>
+        <p:spPr>
+          <a:xfrm>
+            <a:off x="3725662" y="2316163"/>
+            <a:ext cx="4740676" cy="2275967"/>
+          </a:xfrm>
+          <a:prstGeom prst="roundRect">
+            <a:avLst/>
+          </a:prstGeom>
+          <a:solidFill>
+            <a:srgbClr val="121B30"/>
+          </a:solidFill>
+          <a:ln>
+            <a:noFill/>
+          </a:ln>
+        </p:spPr>
+        <p:style>
+          <a:lnRef idx="2">
+            <a:schemeClr val="accent1">
+              <a:shade val="15000"/>
+            </a:schemeClr>
+          </a:lnRef>
+          <a:fillRef idx="1">
+            <a:schemeClr val="accent1"/>
+          </a:fillRef>
+          <a:effectRef idx="0">
+            <a:schemeClr val="accent1"/>
+          </a:effectRef>
+          <a:fontRef idx="minor">
+            <a:schemeClr val="lt1"/>
+          </a:fontRef>
+        </p:style>
+        <p:txBody>
+          <a:bodyPr rtlCol="0" anchor="ctr"/>
+          <a:lstStyle/>
+          <a:p>
+            <a:pPr algn="ctr"/>
+            <a:endParaRPr lang="hu-HU"/>
+          </a:p>
+        </p:txBody>
+      </p:sp>
+      <p:sp>
+        <p:nvSpPr>
           <p:cNvPr id="2" name="Cím 1">
             <a:extLst>
               <a:ext uri="{FF2B5EF4-FFF2-40B4-BE49-F238E27FC236}">
@@ -3855,12 +4048,16 @@
           <a:lstStyle/>
           <a:p>
             <a:r>
+              <a:rPr lang="hu-HU" dirty="0"/>
+              <a:t>„</a:t>
+            </a:r>
+            <a:r>
               <a:rPr lang="en-US" dirty="0"/>
               <a:t>If you don't wear it, sell it</a:t>
             </a:r>
             <a:r>
               <a:rPr lang="hu-HU" dirty="0"/>
-              <a:t>.</a:t>
+              <a:t>.”</a:t>
             </a:r>
           </a:p>
         </p:txBody>
@@ -3875,6 +4072,18 @@
   <p:clrMapOvr>
     <a:masterClrMapping/>
   </p:clrMapOvr>
+  <mc:AlternateContent xmlns:mc="http://schemas.openxmlformats.org/markup-compatibility/2006">
+    <mc:Choice xmlns:p14="http://schemas.microsoft.com/office/powerpoint/2010/main" Requires="p14">
+      <p:transition spd="slow" p14:dur="1600">
+        <p14:prism isContent="1" isInverted="1"/>
+      </p:transition>
+    </mc:Choice>
+    <mc:Fallback>
+      <p:transition spd="slow">
+        <p:fade/>
+      </p:transition>
+    </mc:Fallback>
+  </mc:AlternateContent>
 </p:sld>
 </file>
 
@@ -3897,6 +4106,166 @@
       </p:grpSpPr>
       <p:sp>
         <p:nvSpPr>
+          <p:cNvPr id="4" name="Téglalap: lekerekített 3">
+            <a:extLst>
+              <a:ext uri="{FF2B5EF4-FFF2-40B4-BE49-F238E27FC236}">
+                <a16:creationId xmlns:a16="http://schemas.microsoft.com/office/drawing/2014/main" id="{28F60946-392E-8C30-AD42-1A72C7714E5A}"/>
+              </a:ext>
+            </a:extLst>
+          </p:cNvPr>
+          <p:cNvSpPr/>
+          <p:nvPr/>
+        </p:nvSpPr>
+        <p:spPr>
+          <a:xfrm>
+            <a:off x="3214335" y="1130369"/>
+            <a:ext cx="5763329" cy="4597261"/>
+          </a:xfrm>
+          <a:prstGeom prst="roundRect">
+            <a:avLst/>
+          </a:prstGeom>
+          <a:solidFill>
+            <a:srgbClr val="111A2F">
+              <a:alpha val="90000"/>
+            </a:srgbClr>
+          </a:solidFill>
+          <a:ln>
+            <a:noFill/>
+          </a:ln>
+        </p:spPr>
+        <p:style>
+          <a:lnRef idx="2">
+            <a:schemeClr val="accent1">
+              <a:shade val="15000"/>
+            </a:schemeClr>
+          </a:lnRef>
+          <a:fillRef idx="1">
+            <a:schemeClr val="accent1"/>
+          </a:fillRef>
+          <a:effectRef idx="0">
+            <a:schemeClr val="accent1"/>
+          </a:effectRef>
+          <a:fontRef idx="minor">
+            <a:schemeClr val="lt1"/>
+          </a:fontRef>
+        </p:style>
+        <p:txBody>
+          <a:bodyPr rtlCol="0" anchor="ctr"/>
+          <a:lstStyle/>
+          <a:p>
+            <a:pPr algn="ctr"/>
+            <a:endParaRPr lang="hu-HU"/>
+          </a:p>
+        </p:txBody>
+      </p:sp>
+      <p:sp>
+        <p:nvSpPr>
+          <p:cNvPr id="5" name="Téglalap: lekerekített 4">
+            <a:extLst>
+              <a:ext uri="{FF2B5EF4-FFF2-40B4-BE49-F238E27FC236}">
+                <a16:creationId xmlns:a16="http://schemas.microsoft.com/office/drawing/2014/main" id="{B6AABB16-638F-4B4F-177A-9C9091F8041C}"/>
+              </a:ext>
+            </a:extLst>
+          </p:cNvPr>
+          <p:cNvSpPr/>
+          <p:nvPr/>
+        </p:nvSpPr>
+        <p:spPr>
+          <a:xfrm>
+            <a:off x="3881435" y="1509836"/>
+            <a:ext cx="4429125" cy="825623"/>
+          </a:xfrm>
+          <a:prstGeom prst="roundRect">
+            <a:avLst/>
+          </a:prstGeom>
+          <a:solidFill>
+            <a:srgbClr val="31275A"/>
+          </a:solidFill>
+          <a:ln>
+            <a:noFill/>
+          </a:ln>
+        </p:spPr>
+        <p:style>
+          <a:lnRef idx="2">
+            <a:schemeClr val="accent1">
+              <a:shade val="15000"/>
+            </a:schemeClr>
+          </a:lnRef>
+          <a:fillRef idx="1">
+            <a:schemeClr val="accent1"/>
+          </a:fillRef>
+          <a:effectRef idx="0">
+            <a:schemeClr val="accent1"/>
+          </a:effectRef>
+          <a:fontRef idx="minor">
+            <a:schemeClr val="lt1"/>
+          </a:fontRef>
+        </p:style>
+        <p:txBody>
+          <a:bodyPr rtlCol="0" anchor="ctr"/>
+          <a:lstStyle/>
+          <a:p>
+            <a:pPr algn="ctr"/>
+            <a:endParaRPr lang="hu-HU"/>
+          </a:p>
+        </p:txBody>
+      </p:sp>
+      <p:sp>
+        <p:nvSpPr>
+          <p:cNvPr id="6" name="Téglalap: lekerekített 5">
+            <a:extLst>
+              <a:ext uri="{FF2B5EF4-FFF2-40B4-BE49-F238E27FC236}">
+                <a16:creationId xmlns:a16="http://schemas.microsoft.com/office/drawing/2014/main" id="{808695C8-68D9-78E1-5A3C-8DC7555EABE9}"/>
+              </a:ext>
+            </a:extLst>
+          </p:cNvPr>
+          <p:cNvSpPr/>
+          <p:nvPr/>
+        </p:nvSpPr>
+        <p:spPr>
+          <a:xfrm>
+            <a:off x="3458621" y="2521381"/>
+            <a:ext cx="5274752" cy="2826783"/>
+          </a:xfrm>
+          <a:prstGeom prst="roundRect">
+            <a:avLst>
+              <a:gd name="adj" fmla="val 10265"/>
+            </a:avLst>
+          </a:prstGeom>
+          <a:solidFill>
+            <a:srgbClr val="31275A"/>
+          </a:solidFill>
+          <a:ln>
+            <a:noFill/>
+          </a:ln>
+        </p:spPr>
+        <p:style>
+          <a:lnRef idx="2">
+            <a:schemeClr val="accent1">
+              <a:shade val="15000"/>
+            </a:schemeClr>
+          </a:lnRef>
+          <a:fillRef idx="1">
+            <a:schemeClr val="accent1"/>
+          </a:fillRef>
+          <a:effectRef idx="0">
+            <a:schemeClr val="accent1"/>
+          </a:effectRef>
+          <a:fontRef idx="minor">
+            <a:schemeClr val="lt1"/>
+          </a:fontRef>
+        </p:style>
+        <p:txBody>
+          <a:bodyPr rtlCol="0" anchor="ctr"/>
+          <a:lstStyle/>
+          <a:p>
+            <a:pPr algn="ctr"/>
+            <a:endParaRPr lang="hu-HU"/>
+          </a:p>
+        </p:txBody>
+      </p:sp>
+      <p:sp>
+        <p:nvSpPr>
           <p:cNvPr id="2" name="Cím 1">
             <a:extLst>
               <a:ext uri="{FF2B5EF4-FFF2-40B4-BE49-F238E27FC236}">
@@ -3911,7 +4280,12 @@
             <p:ph type="title"/>
           </p:nvPr>
         </p:nvSpPr>
-        <p:spPr/>
+        <p:spPr>
+          <a:xfrm>
+            <a:off x="4055984" y="1323914"/>
+            <a:ext cx="4080029" cy="1325563"/>
+          </a:xfrm>
+        </p:spPr>
         <p:txBody>
           <a:bodyPr/>
           <a:lstStyle/>
@@ -3948,7 +4322,12 @@
             <p:ph idx="1"/>
           </p:nvPr>
         </p:nvSpPr>
-        <p:spPr/>
+        <p:spPr>
+          <a:xfrm>
+            <a:off x="3548230" y="2714925"/>
+            <a:ext cx="5136472" cy="2675354"/>
+          </a:xfrm>
+        </p:spPr>
         <p:txBody>
           <a:bodyPr/>
           <a:lstStyle/>
@@ -4037,9 +4416,18 @@
   <p:clrMapOvr>
     <a:masterClrMapping/>
   </p:clrMapOvr>
-  <p:transition spd="slow">
-    <p:push dir="u"/>
-  </p:transition>
+  <mc:AlternateContent xmlns:mc="http://schemas.openxmlformats.org/markup-compatibility/2006">
+    <mc:Choice xmlns:p14="http://schemas.microsoft.com/office/powerpoint/2010/main" Requires="p14">
+      <p:transition spd="slow" p14:dur="1600">
+        <p14:prism isContent="1" isInverted="1"/>
+      </p:transition>
+    </mc:Choice>
+    <mc:Fallback>
+      <p:transition spd="slow">
+        <p:fade/>
+      </p:transition>
+    </mc:Fallback>
+  </mc:AlternateContent>
 </p:sld>
 </file>
 
@@ -4062,6 +4450,222 @@
       </p:grpSpPr>
       <p:sp>
         <p:nvSpPr>
+          <p:cNvPr id="7" name="Téglalap: lekerekített 6">
+            <a:extLst>
+              <a:ext uri="{FF2B5EF4-FFF2-40B4-BE49-F238E27FC236}">
+                <a16:creationId xmlns:a16="http://schemas.microsoft.com/office/drawing/2014/main" id="{29588384-3E1E-6129-CB7C-A25BE8F3FFA1}"/>
+              </a:ext>
+            </a:extLst>
+          </p:cNvPr>
+          <p:cNvSpPr/>
+          <p:nvPr/>
+        </p:nvSpPr>
+        <p:spPr>
+          <a:xfrm>
+            <a:off x="504306" y="241069"/>
+            <a:ext cx="11183388" cy="6115281"/>
+          </a:xfrm>
+          <a:prstGeom prst="roundRect">
+            <a:avLst>
+              <a:gd name="adj" fmla="val 6215"/>
+            </a:avLst>
+          </a:prstGeom>
+          <a:solidFill>
+            <a:srgbClr val="111A2F">
+              <a:alpha val="90000"/>
+            </a:srgbClr>
+          </a:solidFill>
+          <a:ln>
+            <a:noFill/>
+          </a:ln>
+        </p:spPr>
+        <p:style>
+          <a:lnRef idx="2">
+            <a:schemeClr val="accent1">
+              <a:shade val="15000"/>
+            </a:schemeClr>
+          </a:lnRef>
+          <a:fillRef idx="1">
+            <a:schemeClr val="accent1"/>
+          </a:fillRef>
+          <a:effectRef idx="0">
+            <a:schemeClr val="accent1"/>
+          </a:effectRef>
+          <a:fontRef idx="minor">
+            <a:schemeClr val="lt1"/>
+          </a:fontRef>
+        </p:style>
+        <p:txBody>
+          <a:bodyPr rtlCol="0" anchor="ctr"/>
+          <a:lstStyle/>
+          <a:p>
+            <a:pPr algn="ctr"/>
+            <a:endParaRPr lang="hu-HU"/>
+          </a:p>
+        </p:txBody>
+      </p:sp>
+      <p:sp>
+        <p:nvSpPr>
+          <p:cNvPr id="9" name="Téglalap: lekerekített 8">
+            <a:extLst>
+              <a:ext uri="{FF2B5EF4-FFF2-40B4-BE49-F238E27FC236}">
+                <a16:creationId xmlns:a16="http://schemas.microsoft.com/office/drawing/2014/main" id="{BE5CF01C-FE44-C52C-99DB-93CA926BCD50}"/>
+              </a:ext>
+            </a:extLst>
+          </p:cNvPr>
+          <p:cNvSpPr/>
+          <p:nvPr/>
+        </p:nvSpPr>
+        <p:spPr>
+          <a:xfrm>
+            <a:off x="838200" y="1690688"/>
+            <a:ext cx="5124735" cy="4486275"/>
+          </a:xfrm>
+          <a:prstGeom prst="roundRect">
+            <a:avLst>
+              <a:gd name="adj" fmla="val 5839"/>
+            </a:avLst>
+          </a:prstGeom>
+          <a:solidFill>
+            <a:srgbClr val="31275A"/>
+          </a:solidFill>
+          <a:ln>
+            <a:noFill/>
+          </a:ln>
+        </p:spPr>
+        <p:style>
+          <a:lnRef idx="2">
+            <a:schemeClr val="accent1">
+              <a:shade val="15000"/>
+            </a:schemeClr>
+          </a:lnRef>
+          <a:fillRef idx="1">
+            <a:schemeClr val="accent1"/>
+          </a:fillRef>
+          <a:effectRef idx="0">
+            <a:schemeClr val="accent1"/>
+          </a:effectRef>
+          <a:fontRef idx="minor">
+            <a:schemeClr val="lt1"/>
+          </a:fontRef>
+        </p:style>
+        <p:txBody>
+          <a:bodyPr rtlCol="0" anchor="ctr"/>
+          <a:lstStyle/>
+          <a:p>
+            <a:pPr algn="ctr"/>
+            <a:endParaRPr lang="hu-HU"/>
+          </a:p>
+        </p:txBody>
+      </p:sp>
+      <p:sp>
+        <p:nvSpPr>
+          <p:cNvPr id="10" name="Téglalap: lekerekített 9">
+            <a:extLst>
+              <a:ext uri="{FF2B5EF4-FFF2-40B4-BE49-F238E27FC236}">
+                <a16:creationId xmlns:a16="http://schemas.microsoft.com/office/drawing/2014/main" id="{7628DEB6-A844-FC8A-BA3F-A73DC3023FB1}"/>
+              </a:ext>
+            </a:extLst>
+          </p:cNvPr>
+          <p:cNvSpPr/>
+          <p:nvPr/>
+        </p:nvSpPr>
+        <p:spPr>
+          <a:xfrm>
+            <a:off x="6134099" y="1652589"/>
+            <a:ext cx="5124735" cy="4486275"/>
+          </a:xfrm>
+          <a:prstGeom prst="roundRect">
+            <a:avLst>
+              <a:gd name="adj" fmla="val 5839"/>
+            </a:avLst>
+          </a:prstGeom>
+          <a:solidFill>
+            <a:srgbClr val="31275A"/>
+          </a:solidFill>
+          <a:ln>
+            <a:noFill/>
+          </a:ln>
+        </p:spPr>
+        <p:style>
+          <a:lnRef idx="2">
+            <a:schemeClr val="accent1">
+              <a:shade val="15000"/>
+            </a:schemeClr>
+          </a:lnRef>
+          <a:fillRef idx="1">
+            <a:schemeClr val="accent1"/>
+          </a:fillRef>
+          <a:effectRef idx="0">
+            <a:schemeClr val="accent1"/>
+          </a:effectRef>
+          <a:fontRef idx="minor">
+            <a:schemeClr val="lt1"/>
+          </a:fontRef>
+        </p:style>
+        <p:txBody>
+          <a:bodyPr rtlCol="0" anchor="ctr"/>
+          <a:lstStyle/>
+          <a:p>
+            <a:pPr algn="ctr"/>
+            <a:endParaRPr lang="hu-HU"/>
+          </a:p>
+        </p:txBody>
+      </p:sp>
+      <p:sp>
+        <p:nvSpPr>
+          <p:cNvPr id="8" name="Téglalap: lekerekített 7">
+            <a:extLst>
+              <a:ext uri="{FF2B5EF4-FFF2-40B4-BE49-F238E27FC236}">
+                <a16:creationId xmlns:a16="http://schemas.microsoft.com/office/drawing/2014/main" id="{5F975F3B-C2EB-2AE5-7EEB-040B4C0DCC23}"/>
+              </a:ext>
+            </a:extLst>
+          </p:cNvPr>
+          <p:cNvSpPr/>
+          <p:nvPr/>
+        </p:nvSpPr>
+        <p:spPr>
+          <a:xfrm>
+            <a:off x="838200" y="594804"/>
+            <a:ext cx="5704643" cy="825623"/>
+          </a:xfrm>
+          <a:prstGeom prst="roundRect">
+            <a:avLst/>
+          </a:prstGeom>
+          <a:solidFill>
+            <a:srgbClr val="31275A"/>
+          </a:solidFill>
+          <a:ln>
+            <a:noFill/>
+          </a:ln>
+        </p:spPr>
+        <p:style>
+          <a:lnRef idx="2">
+            <a:schemeClr val="accent1">
+              <a:shade val="15000"/>
+            </a:schemeClr>
+          </a:lnRef>
+          <a:fillRef idx="1">
+            <a:schemeClr val="accent1"/>
+          </a:fillRef>
+          <a:effectRef idx="0">
+            <a:schemeClr val="accent1"/>
+          </a:effectRef>
+          <a:fontRef idx="minor">
+            <a:schemeClr val="lt1"/>
+          </a:fontRef>
+        </p:style>
+        <p:txBody>
+          <a:bodyPr rtlCol="0" anchor="ctr"/>
+          <a:lstStyle/>
+          <a:p>
+            <a:pPr algn="ctr"/>
+            <a:endParaRPr lang="hu-HU"/>
+          </a:p>
+        </p:txBody>
+      </p:sp>
+      <p:sp>
+        <p:nvSpPr>
           <p:cNvPr id="2" name="Cím 1">
             <a:extLst>
               <a:ext uri="{FF2B5EF4-FFF2-40B4-BE49-F238E27FC236}">
@@ -4123,16 +4727,36 @@
           </a:xfrm>
         </p:spPr>
         <p:txBody>
-          <a:bodyPr/>
+          <a:bodyPr>
+            <a:normAutofit fontScale="92500" lnSpcReduction="10000"/>
+          </a:bodyPr>
           <a:lstStyle/>
           <a:p>
+            <a:pPr marL="0" indent="0" defTabSz="720000">
+              <a:buNone/>
+              <a:tabLst>
+                <a:tab pos="360000" algn="l"/>
+              </a:tabLst>
+            </a:pPr>
+            <a:r>
+              <a:rPr lang="hu-HU" dirty="0"/>
+              <a:t>	</a:t>
+            </a:r>
             <a:r>
               <a:rPr lang="en-US" dirty="0"/>
               <a:t>Seamless Integration &amp; </a:t>
             </a:r>
             <a:r>
               <a:rPr lang="en-US" b="1" dirty="0"/>
-              <a:t>User-Friendly Design</a:t>
+              <a:t>User-</a:t>
+            </a:r>
+            <a:r>
+              <a:rPr lang="hu-HU" b="1" dirty="0"/>
+              <a:t>	</a:t>
+            </a:r>
+            <a:r>
+              <a:rPr lang="en-US" b="1" dirty="0"/>
+              <a:t>Friendly Design</a:t>
             </a:r>
             <a:r>
               <a:rPr lang="en-US" dirty="0"/>
@@ -4216,46 +4840,46 @@
             <a:pPr lvl="1" algn="just"/>
             <a:r>
               <a:rPr lang="en-US" dirty="0"/>
-              <a:t>Strengthens the sense of </a:t>
+              <a:t>Reduces the time spent searching through listings with </a:t>
             </a:r>
             <a:r>
               <a:rPr lang="en-US" b="1" dirty="0"/>
-              <a:t>community</a:t>
+              <a:t>smart filtering </a:t>
+            </a:r>
+            <a:r>
+              <a:rPr lang="en-US" dirty="0"/>
+              <a:t>and </a:t>
+            </a:r>
+            <a:r>
+              <a:rPr lang="en-US" b="1" dirty="0"/>
+              <a:t>personalized suggestions</a:t>
             </a:r>
           </a:p>
           <a:p>
             <a:pPr lvl="1" algn="just"/>
             <a:r>
               <a:rPr lang="en-US" dirty="0"/>
-              <a:t>Adds </a:t>
+              <a:t>Encourages sustainable shopping habits by making second‑hand purchases </a:t>
             </a:r>
             <a:r>
               <a:rPr lang="en-US" b="1" dirty="0"/>
-              <a:t>excitement</a:t>
-            </a:r>
+              <a:t>more appealing</a:t>
+            </a:r>
+          </a:p>
+          <a:p>
+            <a:pPr lvl="1" algn="just"/>
             <a:r>
               <a:rPr lang="en-US" dirty="0"/>
-              <a:t> and </a:t>
+              <a:t>Builds </a:t>
             </a:r>
             <a:r>
               <a:rPr lang="en-US" b="1" dirty="0"/>
-              <a:t>innovation</a:t>
+              <a:t>trust</a:t>
             </a:r>
             <a:r>
               <a:rPr lang="en-US" dirty="0"/>
-              <a:t> to the environment</a:t>
-            </a:r>
-            <a:r>
-              <a:rPr lang="hu-HU" dirty="0"/>
-              <a:t> of online </a:t>
-            </a:r>
-            <a:r>
-              <a:rPr lang="hu-HU" dirty="0" err="1"/>
-              <a:t>markets</a:t>
-            </a:r>
-            <a:endParaRPr lang="en-US" dirty="0"/>
-          </a:p>
-          <a:p>
+              <a:t> through transparent profiles, clear item descriptions, and smooth communication</a:t>
+            </a:r>
             <a:endParaRPr lang="hu-HU" dirty="0"/>
           </a:p>
         </p:txBody>
@@ -4276,8 +4900,8 @@
         </p:nvSpPr>
         <p:spPr>
           <a:xfrm>
-            <a:off x="6229066" y="1825625"/>
-            <a:ext cx="4934803" cy="4351338"/>
+            <a:off x="6134100" y="1825625"/>
+            <a:ext cx="5029770" cy="4351338"/>
           </a:xfrm>
           <a:prstGeom prst="rect">
             <a:avLst/>
@@ -4285,7 +4909,7 @@
         </p:spPr>
         <p:txBody>
           <a:bodyPr vert="horz" lIns="91440" tIns="45720" rIns="91440" bIns="45720" rtlCol="0">
-            <a:normAutofit/>
+            <a:normAutofit fontScale="92500"/>
           </a:bodyPr>
           <a:lstStyle>
             <a:lvl1pPr marL="228600" indent="-228600" algn="l" defTabSz="914400" rtl="0" eaLnBrk="1" latinLnBrk="0" hangingPunct="1">
@@ -4452,6 +5076,20 @@
             </a:lvl9pPr>
           </a:lstStyle>
           <a:p>
+            <a:pPr marL="0" indent="0">
+              <a:buNone/>
+              <a:tabLst>
+                <a:tab pos="360000" algn="l"/>
+              </a:tabLst>
+            </a:pPr>
+            <a:r>
+              <a:rPr lang="hu-HU" dirty="0">
+                <a:solidFill>
+                  <a:schemeClr val="bg1"/>
+                </a:solidFill>
+              </a:rPr>
+              <a:t>	</a:t>
+            </a:r>
             <a:r>
               <a:rPr lang="en-US" dirty="0">
                 <a:solidFill>
@@ -4496,42 +5134,64 @@
               <a:t>computers</a:t>
             </a:r>
             <a:r>
-              <a:rPr lang="hu-HU" b="1" dirty="0">
+              <a:rPr lang="en-US" dirty="0">
                 <a:solidFill>
                   <a:schemeClr val="bg1"/>
                 </a:solidFill>
               </a:rPr>
-              <a:t> </a:t>
-            </a:r>
-            <a:r>
-              <a:rPr lang="hu-HU" dirty="0">
+              <a:t> through a fully responsive design</a:t>
+            </a:r>
+          </a:p>
+          <a:p>
+            <a:pPr lvl="1" algn="just"/>
+            <a:r>
+              <a:rPr lang="en-US" dirty="0">
                 <a:solidFill>
                   <a:schemeClr val="bg1"/>
                 </a:solidFill>
               </a:rPr>
-              <a:t>(</a:t>
-            </a:r>
-            <a:r>
-              <a:rPr lang="hu-HU" dirty="0" err="1">
+              <a:t>Provides a </a:t>
+            </a:r>
+            <a:r>
+              <a:rPr lang="en-US" b="1" dirty="0">
                 <a:solidFill>
                   <a:schemeClr val="bg1"/>
                 </a:solidFill>
               </a:rPr>
-              <a:t>responsive</a:t>
-            </a:r>
-            <a:r>
-              <a:rPr lang="hu-HU" dirty="0">
+              <a:t>clean</a:t>
+            </a:r>
+            <a:r>
+              <a:rPr lang="en-US" dirty="0">
                 <a:solidFill>
                   <a:schemeClr val="bg1"/>
                 </a:solidFill>
               </a:rPr>
-              <a:t> design)</a:t>
-            </a:r>
-            <a:endParaRPr lang="en-US" dirty="0">
-              <a:solidFill>
-                <a:schemeClr val="bg1"/>
-              </a:solidFill>
-            </a:endParaRPr>
+              <a:t>, </a:t>
+            </a:r>
+            <a:r>
+              <a:rPr lang="en-US" b="1" dirty="0">
+                <a:solidFill>
+                  <a:schemeClr val="bg1"/>
+                </a:solidFill>
+              </a:rPr>
+              <a:t>intuitive interface</a:t>
+            </a:r>
+            <a:r>
+              <a:rPr lang="en-US" dirty="0">
+                <a:solidFill>
+                  <a:schemeClr val="bg1"/>
+                </a:solidFill>
+              </a:rPr>
+              <a:t> that helps users navigate </a:t>
+            </a:r>
+            <a:r>
+              <a:rPr lang="en-US" b="1" dirty="0">
+                <a:solidFill>
+                  <a:schemeClr val="bg1"/>
+                </a:solidFill>
+              </a:rPr>
+              <a:t>effortlessly</a:t>
+            </a:r>
           </a:p>
           <a:p>
             <a:pPr lvl="1" algn="just"/>
@@ -4541,7 +5201,7 @@
                   <a:schemeClr val="bg1"/>
                 </a:solidFill>
               </a:rPr>
-              <a:t>Ensures </a:t>
+              <a:t>Built with </a:t>
             </a:r>
             <a:r>
               <a:rPr lang="en-US" b="1" dirty="0">
@@ -4549,7 +5209,7 @@
                   <a:schemeClr val="bg1"/>
                 </a:solidFill>
               </a:rPr>
-              <a:t>broad usability </a:t>
+              <a:t>modern web technologies </a:t>
             </a:r>
             <a:r>
               <a:rPr lang="en-US" dirty="0">
@@ -4557,10 +5217,51 @@
                   <a:schemeClr val="bg1"/>
                 </a:solidFill>
               </a:rPr>
-              <a:t>and convenience</a:t>
-            </a:r>
-          </a:p>
-          <a:p>
+              <a:t>to ensure reliability and long‑term stability</a:t>
+            </a:r>
+          </a:p>
+          <a:p>
+            <a:pPr lvl="1" algn="just"/>
+            <a:r>
+              <a:rPr lang="en-US" dirty="0">
+                <a:solidFill>
+                  <a:schemeClr val="bg1"/>
+                </a:solidFill>
+              </a:rPr>
+              <a:t>Supports </a:t>
+            </a:r>
+            <a:r>
+              <a:rPr lang="en-US" b="1" dirty="0">
+                <a:solidFill>
+                  <a:schemeClr val="bg1"/>
+                </a:solidFill>
+              </a:rPr>
+              <a:t>secure communication</a:t>
+            </a:r>
+            <a:r>
+              <a:rPr lang="en-US" dirty="0">
+                <a:solidFill>
+                  <a:schemeClr val="bg1"/>
+                </a:solidFill>
+              </a:rPr>
+              <a:t> and </a:t>
+            </a:r>
+            <a:r>
+              <a:rPr lang="en-US" b="1" dirty="0">
+                <a:solidFill>
+                  <a:schemeClr val="bg1"/>
+                </a:solidFill>
+              </a:rPr>
+              <a:t>safe interactions </a:t>
+            </a:r>
+            <a:r>
+              <a:rPr lang="en-US" dirty="0">
+                <a:solidFill>
+                  <a:schemeClr val="bg1"/>
+                </a:solidFill>
+              </a:rPr>
+              <a:t>between buyers and sellers</a:t>
+            </a:r>
             <a:endParaRPr lang="hu-HU" dirty="0"/>
           </a:p>
         </p:txBody>
@@ -4575,9 +5276,18 @@
   <p:clrMapOvr>
     <a:masterClrMapping/>
   </p:clrMapOvr>
-  <p:transition spd="slow">
-    <p:push dir="u"/>
-  </p:transition>
+  <mc:AlternateContent xmlns:mc="http://schemas.openxmlformats.org/markup-compatibility/2006">
+    <mc:Choice xmlns:p14="http://schemas.microsoft.com/office/powerpoint/2010/main" Requires="p14">
+      <p:transition spd="slow" p14:dur="1600">
+        <p14:prism isContent="1" isInverted="1"/>
+      </p:transition>
+    </mc:Choice>
+    <mc:Fallback>
+      <p:transition spd="slow">
+        <p:fade/>
+      </p:transition>
+    </mc:Fallback>
+  </mc:AlternateContent>
 </p:sld>
 </file>
 
@@ -4600,6 +5310,222 @@
       </p:grpSpPr>
       <p:sp>
         <p:nvSpPr>
+          <p:cNvPr id="5" name="Téglalap: lekerekített 4">
+            <a:extLst>
+              <a:ext uri="{FF2B5EF4-FFF2-40B4-BE49-F238E27FC236}">
+                <a16:creationId xmlns:a16="http://schemas.microsoft.com/office/drawing/2014/main" id="{D44FC257-7FDD-91ED-ABD0-4296D91F7CCF}"/>
+              </a:ext>
+            </a:extLst>
+          </p:cNvPr>
+          <p:cNvSpPr/>
+          <p:nvPr/>
+        </p:nvSpPr>
+        <p:spPr>
+          <a:xfrm>
+            <a:off x="504306" y="241069"/>
+            <a:ext cx="11183388" cy="6115281"/>
+          </a:xfrm>
+          <a:prstGeom prst="roundRect">
+            <a:avLst>
+              <a:gd name="adj" fmla="val 6215"/>
+            </a:avLst>
+          </a:prstGeom>
+          <a:solidFill>
+            <a:srgbClr val="111A2F">
+              <a:alpha val="90000"/>
+            </a:srgbClr>
+          </a:solidFill>
+          <a:ln>
+            <a:noFill/>
+          </a:ln>
+        </p:spPr>
+        <p:style>
+          <a:lnRef idx="2">
+            <a:schemeClr val="accent1">
+              <a:shade val="15000"/>
+            </a:schemeClr>
+          </a:lnRef>
+          <a:fillRef idx="1">
+            <a:schemeClr val="accent1"/>
+          </a:fillRef>
+          <a:effectRef idx="0">
+            <a:schemeClr val="accent1"/>
+          </a:effectRef>
+          <a:fontRef idx="minor">
+            <a:schemeClr val="lt1"/>
+          </a:fontRef>
+        </p:style>
+        <p:txBody>
+          <a:bodyPr rtlCol="0" anchor="ctr"/>
+          <a:lstStyle/>
+          <a:p>
+            <a:pPr algn="ctr"/>
+            <a:endParaRPr lang="hu-HU"/>
+          </a:p>
+        </p:txBody>
+      </p:sp>
+      <p:sp>
+        <p:nvSpPr>
+          <p:cNvPr id="6" name="Téglalap: lekerekített 5">
+            <a:extLst>
+              <a:ext uri="{FF2B5EF4-FFF2-40B4-BE49-F238E27FC236}">
+                <a16:creationId xmlns:a16="http://schemas.microsoft.com/office/drawing/2014/main" id="{C3E8429D-90E0-329E-435C-2190F4B729D2}"/>
+              </a:ext>
+            </a:extLst>
+          </p:cNvPr>
+          <p:cNvSpPr/>
+          <p:nvPr/>
+        </p:nvSpPr>
+        <p:spPr>
+          <a:xfrm>
+            <a:off x="838200" y="594804"/>
+            <a:ext cx="3419475" cy="825623"/>
+          </a:xfrm>
+          <a:prstGeom prst="roundRect">
+            <a:avLst/>
+          </a:prstGeom>
+          <a:solidFill>
+            <a:srgbClr val="31275A"/>
+          </a:solidFill>
+          <a:ln>
+            <a:noFill/>
+          </a:ln>
+        </p:spPr>
+        <p:style>
+          <a:lnRef idx="2">
+            <a:schemeClr val="accent1">
+              <a:shade val="15000"/>
+            </a:schemeClr>
+          </a:lnRef>
+          <a:fillRef idx="1">
+            <a:schemeClr val="accent1"/>
+          </a:fillRef>
+          <a:effectRef idx="0">
+            <a:schemeClr val="accent1"/>
+          </a:effectRef>
+          <a:fontRef idx="minor">
+            <a:schemeClr val="lt1"/>
+          </a:fontRef>
+        </p:style>
+        <p:txBody>
+          <a:bodyPr rtlCol="0" anchor="ctr"/>
+          <a:lstStyle/>
+          <a:p>
+            <a:pPr algn="ctr"/>
+            <a:endParaRPr lang="hu-HU"/>
+          </a:p>
+        </p:txBody>
+      </p:sp>
+      <p:sp>
+        <p:nvSpPr>
+          <p:cNvPr id="10" name="Téglalap: lekerekített 9">
+            <a:extLst>
+              <a:ext uri="{FF2B5EF4-FFF2-40B4-BE49-F238E27FC236}">
+                <a16:creationId xmlns:a16="http://schemas.microsoft.com/office/drawing/2014/main" id="{ED6A10DA-C1EA-D686-4907-5A319C81DF5E}"/>
+              </a:ext>
+            </a:extLst>
+          </p:cNvPr>
+          <p:cNvSpPr/>
+          <p:nvPr/>
+        </p:nvSpPr>
+        <p:spPr>
+          <a:xfrm>
+            <a:off x="1905000" y="1690688"/>
+            <a:ext cx="3095625" cy="4071937"/>
+          </a:xfrm>
+          <a:prstGeom prst="roundRect">
+            <a:avLst>
+              <a:gd name="adj" fmla="val 8359"/>
+            </a:avLst>
+          </a:prstGeom>
+          <a:solidFill>
+            <a:srgbClr val="31275A"/>
+          </a:solidFill>
+          <a:ln>
+            <a:noFill/>
+          </a:ln>
+        </p:spPr>
+        <p:style>
+          <a:lnRef idx="2">
+            <a:schemeClr val="accent1">
+              <a:shade val="15000"/>
+            </a:schemeClr>
+          </a:lnRef>
+          <a:fillRef idx="1">
+            <a:schemeClr val="accent1"/>
+          </a:fillRef>
+          <a:effectRef idx="0">
+            <a:schemeClr val="accent1"/>
+          </a:effectRef>
+          <a:fontRef idx="minor">
+            <a:schemeClr val="lt1"/>
+          </a:fontRef>
+        </p:style>
+        <p:txBody>
+          <a:bodyPr rtlCol="0" anchor="ctr"/>
+          <a:lstStyle/>
+          <a:p>
+            <a:pPr algn="ctr"/>
+            <a:endParaRPr lang="hu-HU"/>
+          </a:p>
+        </p:txBody>
+      </p:sp>
+      <p:sp>
+        <p:nvSpPr>
+          <p:cNvPr id="11" name="Téglalap: lekerekített 10">
+            <a:extLst>
+              <a:ext uri="{FF2B5EF4-FFF2-40B4-BE49-F238E27FC236}">
+                <a16:creationId xmlns:a16="http://schemas.microsoft.com/office/drawing/2014/main" id="{EC706663-A1E3-E341-7516-4F92D92BEFE6}"/>
+              </a:ext>
+            </a:extLst>
+          </p:cNvPr>
+          <p:cNvSpPr/>
+          <p:nvPr/>
+        </p:nvSpPr>
+        <p:spPr>
+          <a:xfrm>
+            <a:off x="7177087" y="1690688"/>
+            <a:ext cx="3095625" cy="4071937"/>
+          </a:xfrm>
+          <a:prstGeom prst="roundRect">
+            <a:avLst>
+              <a:gd name="adj" fmla="val 8359"/>
+            </a:avLst>
+          </a:prstGeom>
+          <a:solidFill>
+            <a:srgbClr val="31275A"/>
+          </a:solidFill>
+          <a:ln>
+            <a:noFill/>
+          </a:ln>
+        </p:spPr>
+        <p:style>
+          <a:lnRef idx="2">
+            <a:schemeClr val="accent1">
+              <a:shade val="15000"/>
+            </a:schemeClr>
+          </a:lnRef>
+          <a:fillRef idx="1">
+            <a:schemeClr val="accent1"/>
+          </a:fillRef>
+          <a:effectRef idx="0">
+            <a:schemeClr val="accent1"/>
+          </a:effectRef>
+          <a:fontRef idx="minor">
+            <a:schemeClr val="lt1"/>
+          </a:fontRef>
+        </p:style>
+        <p:txBody>
+          <a:bodyPr rtlCol="0" anchor="ctr"/>
+          <a:lstStyle/>
+          <a:p>
+            <a:pPr algn="ctr"/>
+            <a:endParaRPr lang="hu-HU"/>
+          </a:p>
+        </p:txBody>
+      </p:sp>
+      <p:sp>
+        <p:nvSpPr>
           <p:cNvPr id="2" name="Cím 1">
             <a:extLst>
               <a:ext uri="{FF2B5EF4-FFF2-40B4-BE49-F238E27FC236}">
@@ -4669,14 +5595,14 @@
             <a:pPr algn="ctr"/>
             <a:r>
               <a:rPr lang="hu-HU" sz="2000" dirty="0"/>
-              <a:t>React.js</a:t>
+              <a:t>React.js + VITE</a:t>
             </a:r>
           </a:p>
           <a:p>
             <a:pPr algn="ctr"/>
             <a:r>
               <a:rPr lang="hu-HU" sz="2000" dirty="0" err="1"/>
-              <a:t>Tailwind</a:t>
+              <a:t>Tailwindcss</a:t>
             </a:r>
             <a:endParaRPr lang="hu-HU" sz="2000" dirty="0"/>
           </a:p>
@@ -5130,10 +6056,21 @@
               <a:rPr lang="hu-HU" sz="2000" dirty="0" err="1"/>
               <a:t>Prisma</a:t>
             </a:r>
-            <a:endParaRPr lang="hu-HU" sz="2000" dirty="0"/>
-          </a:p>
-          <a:p>
-            <a:pPr algn="ctr"/>
+            <a:r>
+              <a:rPr lang="hu-HU" sz="2000" dirty="0"/>
+              <a:t> ORM </a:t>
+            </a:r>
+            <a:r>
+              <a:rPr lang="hu-HU" sz="2000" dirty="0" err="1"/>
+              <a:t>with</a:t>
+            </a:r>
+            <a:r>
+              <a:rPr lang="hu-HU" sz="2000" dirty="0"/>
+              <a:t> </a:t>
+            </a:r>
+            <a:br>
+              <a:rPr lang="hu-HU" sz="2000" dirty="0"/>
+            </a:br>
             <a:r>
               <a:rPr lang="hu-HU" sz="2000" dirty="0" err="1"/>
               <a:t>MySQL</a:t>
@@ -5383,9 +6320,18 @@
   <p:clrMapOvr>
     <a:masterClrMapping/>
   </p:clrMapOvr>
-  <p:transition spd="slow">
-    <p:push dir="u"/>
-  </p:transition>
+  <mc:AlternateContent xmlns:mc="http://schemas.openxmlformats.org/markup-compatibility/2006">
+    <mc:Choice xmlns:p14="http://schemas.microsoft.com/office/powerpoint/2010/main" Requires="p14">
+      <p:transition spd="slow" p14:dur="1600">
+        <p14:prism isContent="1" isInverted="1"/>
+      </p:transition>
+    </mc:Choice>
+    <mc:Fallback>
+      <p:transition spd="slow">
+        <p:fade/>
+      </p:transition>
+    </mc:Fallback>
+  </mc:AlternateContent>
 </p:sld>
 </file>
 
@@ -5408,6 +6354,322 @@
       </p:grpSpPr>
       <p:sp>
         <p:nvSpPr>
+          <p:cNvPr id="7" name="Téglalap: lekerekített 6">
+            <a:extLst>
+              <a:ext uri="{FF2B5EF4-FFF2-40B4-BE49-F238E27FC236}">
+                <a16:creationId xmlns:a16="http://schemas.microsoft.com/office/drawing/2014/main" id="{B31D5282-5F07-CCB4-421A-EAC7C513BADB}"/>
+              </a:ext>
+            </a:extLst>
+          </p:cNvPr>
+          <p:cNvSpPr/>
+          <p:nvPr/>
+        </p:nvSpPr>
+        <p:spPr>
+          <a:xfrm>
+            <a:off x="504306" y="241069"/>
+            <a:ext cx="11183388" cy="6115281"/>
+          </a:xfrm>
+          <a:prstGeom prst="roundRect">
+            <a:avLst>
+              <a:gd name="adj" fmla="val 6215"/>
+            </a:avLst>
+          </a:prstGeom>
+          <a:solidFill>
+            <a:srgbClr val="111A2F">
+              <a:alpha val="90000"/>
+            </a:srgbClr>
+          </a:solidFill>
+          <a:ln>
+            <a:noFill/>
+          </a:ln>
+        </p:spPr>
+        <p:style>
+          <a:lnRef idx="2">
+            <a:schemeClr val="accent1">
+              <a:shade val="15000"/>
+            </a:schemeClr>
+          </a:lnRef>
+          <a:fillRef idx="1">
+            <a:schemeClr val="accent1"/>
+          </a:fillRef>
+          <a:effectRef idx="0">
+            <a:schemeClr val="accent1"/>
+          </a:effectRef>
+          <a:fontRef idx="minor">
+            <a:schemeClr val="lt1"/>
+          </a:fontRef>
+        </p:style>
+        <p:txBody>
+          <a:bodyPr rtlCol="0" anchor="ctr"/>
+          <a:lstStyle/>
+          <a:p>
+            <a:pPr algn="ctr"/>
+            <a:endParaRPr lang="hu-HU"/>
+          </a:p>
+        </p:txBody>
+      </p:sp>
+      <p:sp>
+        <p:nvSpPr>
+          <p:cNvPr id="10" name="Téglalap: lekerekített 9">
+            <a:extLst>
+              <a:ext uri="{FF2B5EF4-FFF2-40B4-BE49-F238E27FC236}">
+                <a16:creationId xmlns:a16="http://schemas.microsoft.com/office/drawing/2014/main" id="{8B9171E1-971D-6A95-5B35-EAE286A903CC}"/>
+              </a:ext>
+            </a:extLst>
+          </p:cNvPr>
+          <p:cNvSpPr/>
+          <p:nvPr/>
+        </p:nvSpPr>
+        <p:spPr>
+          <a:xfrm>
+            <a:off x="4796297" y="2010377"/>
+            <a:ext cx="2599406" cy="1104237"/>
+          </a:xfrm>
+          <a:prstGeom prst="roundRect">
+            <a:avLst/>
+          </a:prstGeom>
+          <a:solidFill>
+            <a:srgbClr val="31275A"/>
+          </a:solidFill>
+          <a:ln>
+            <a:noFill/>
+          </a:ln>
+        </p:spPr>
+        <p:style>
+          <a:lnRef idx="2">
+            <a:schemeClr val="accent1">
+              <a:shade val="15000"/>
+            </a:schemeClr>
+          </a:lnRef>
+          <a:fillRef idx="1">
+            <a:schemeClr val="accent1"/>
+          </a:fillRef>
+          <a:effectRef idx="0">
+            <a:schemeClr val="accent1"/>
+          </a:effectRef>
+          <a:fontRef idx="minor">
+            <a:schemeClr val="lt1"/>
+          </a:fontRef>
+        </p:style>
+        <p:txBody>
+          <a:bodyPr rtlCol="0" anchor="ctr"/>
+          <a:lstStyle/>
+          <a:p>
+            <a:pPr algn="ctr"/>
+            <a:endParaRPr lang="hu-HU"/>
+          </a:p>
+        </p:txBody>
+      </p:sp>
+      <p:sp>
+        <p:nvSpPr>
+          <p:cNvPr id="11" name="Téglalap: lekerekített 10">
+            <a:extLst>
+              <a:ext uri="{FF2B5EF4-FFF2-40B4-BE49-F238E27FC236}">
+                <a16:creationId xmlns:a16="http://schemas.microsoft.com/office/drawing/2014/main" id="{E4467697-EC4A-FA3E-0D56-269951B94C7E}"/>
+              </a:ext>
+            </a:extLst>
+          </p:cNvPr>
+          <p:cNvSpPr/>
+          <p:nvPr/>
+        </p:nvSpPr>
+        <p:spPr>
+          <a:xfrm>
+            <a:off x="8756620" y="3007850"/>
+            <a:ext cx="2139603" cy="1104237"/>
+          </a:xfrm>
+          <a:prstGeom prst="roundRect">
+            <a:avLst/>
+          </a:prstGeom>
+          <a:solidFill>
+            <a:srgbClr val="31275A"/>
+          </a:solidFill>
+          <a:ln>
+            <a:noFill/>
+          </a:ln>
+        </p:spPr>
+        <p:style>
+          <a:lnRef idx="2">
+            <a:schemeClr val="accent1">
+              <a:shade val="15000"/>
+            </a:schemeClr>
+          </a:lnRef>
+          <a:fillRef idx="1">
+            <a:schemeClr val="accent1"/>
+          </a:fillRef>
+          <a:effectRef idx="0">
+            <a:schemeClr val="accent1"/>
+          </a:effectRef>
+          <a:fontRef idx="minor">
+            <a:schemeClr val="lt1"/>
+          </a:fontRef>
+        </p:style>
+        <p:txBody>
+          <a:bodyPr rtlCol="0" anchor="ctr"/>
+          <a:lstStyle/>
+          <a:p>
+            <a:pPr algn="ctr"/>
+            <a:endParaRPr lang="hu-HU"/>
+          </a:p>
+        </p:txBody>
+      </p:sp>
+      <p:sp>
+        <p:nvSpPr>
+          <p:cNvPr id="14" name="Téglalap: lekerekített 13">
+            <a:extLst>
+              <a:ext uri="{FF2B5EF4-FFF2-40B4-BE49-F238E27FC236}">
+                <a16:creationId xmlns:a16="http://schemas.microsoft.com/office/drawing/2014/main" id="{30D1BDE7-E8DE-7939-8040-5DF6050B57B5}"/>
+              </a:ext>
+            </a:extLst>
+          </p:cNvPr>
+          <p:cNvSpPr/>
+          <p:nvPr/>
+        </p:nvSpPr>
+        <p:spPr>
+          <a:xfrm>
+            <a:off x="5137582" y="4023434"/>
+            <a:ext cx="1916836" cy="1104237"/>
+          </a:xfrm>
+          <a:prstGeom prst="roundRect">
+            <a:avLst/>
+          </a:prstGeom>
+          <a:solidFill>
+            <a:srgbClr val="31275A"/>
+          </a:solidFill>
+          <a:ln>
+            <a:noFill/>
+          </a:ln>
+        </p:spPr>
+        <p:style>
+          <a:lnRef idx="2">
+            <a:schemeClr val="accent1">
+              <a:shade val="15000"/>
+            </a:schemeClr>
+          </a:lnRef>
+          <a:fillRef idx="1">
+            <a:schemeClr val="accent1"/>
+          </a:fillRef>
+          <a:effectRef idx="0">
+            <a:schemeClr val="accent1"/>
+          </a:effectRef>
+          <a:fontRef idx="minor">
+            <a:schemeClr val="lt1"/>
+          </a:fontRef>
+        </p:style>
+        <p:txBody>
+          <a:bodyPr rtlCol="0" anchor="ctr"/>
+          <a:lstStyle/>
+          <a:p>
+            <a:pPr algn="ctr"/>
+            <a:endParaRPr lang="hu-HU"/>
+          </a:p>
+        </p:txBody>
+      </p:sp>
+      <p:sp>
+        <p:nvSpPr>
+          <p:cNvPr id="9" name="Téglalap: lekerekített 8">
+            <a:extLst>
+              <a:ext uri="{FF2B5EF4-FFF2-40B4-BE49-F238E27FC236}">
+                <a16:creationId xmlns:a16="http://schemas.microsoft.com/office/drawing/2014/main" id="{324C3018-FDF0-6F8D-C0DA-59193619A33A}"/>
+              </a:ext>
+            </a:extLst>
+          </p:cNvPr>
+          <p:cNvSpPr/>
+          <p:nvPr/>
+        </p:nvSpPr>
+        <p:spPr>
+          <a:xfrm>
+            <a:off x="1527700" y="3007850"/>
+            <a:ext cx="1916836" cy="1104237"/>
+          </a:xfrm>
+          <a:prstGeom prst="roundRect">
+            <a:avLst/>
+          </a:prstGeom>
+          <a:solidFill>
+            <a:srgbClr val="31275A"/>
+          </a:solidFill>
+          <a:ln>
+            <a:noFill/>
+          </a:ln>
+        </p:spPr>
+        <p:style>
+          <a:lnRef idx="2">
+            <a:schemeClr val="accent1">
+              <a:shade val="15000"/>
+            </a:schemeClr>
+          </a:lnRef>
+          <a:fillRef idx="1">
+            <a:schemeClr val="accent1"/>
+          </a:fillRef>
+          <a:effectRef idx="0">
+            <a:schemeClr val="accent1"/>
+          </a:effectRef>
+          <a:fontRef idx="minor">
+            <a:schemeClr val="lt1"/>
+          </a:fontRef>
+        </p:style>
+        <p:txBody>
+          <a:bodyPr rtlCol="0" anchor="ctr"/>
+          <a:lstStyle/>
+          <a:p>
+            <a:pPr algn="ctr"/>
+            <a:endParaRPr lang="hu-HU"/>
+          </a:p>
+        </p:txBody>
+      </p:sp>
+      <p:sp>
+        <p:nvSpPr>
+          <p:cNvPr id="8" name="Téglalap: lekerekített 7">
+            <a:extLst>
+              <a:ext uri="{FF2B5EF4-FFF2-40B4-BE49-F238E27FC236}">
+                <a16:creationId xmlns:a16="http://schemas.microsoft.com/office/drawing/2014/main" id="{4825771A-0491-5A4B-1726-346030B36CAD}"/>
+              </a:ext>
+            </a:extLst>
+          </p:cNvPr>
+          <p:cNvSpPr/>
+          <p:nvPr/>
+        </p:nvSpPr>
+        <p:spPr>
+          <a:xfrm>
+            <a:off x="838200" y="594804"/>
+            <a:ext cx="6172200" cy="825623"/>
+          </a:xfrm>
+          <a:prstGeom prst="roundRect">
+            <a:avLst/>
+          </a:prstGeom>
+          <a:solidFill>
+            <a:srgbClr val="31275A"/>
+          </a:solidFill>
+          <a:ln>
+            <a:noFill/>
+          </a:ln>
+        </p:spPr>
+        <p:style>
+          <a:lnRef idx="2">
+            <a:schemeClr val="accent1">
+              <a:shade val="15000"/>
+            </a:schemeClr>
+          </a:lnRef>
+          <a:fillRef idx="1">
+            <a:schemeClr val="accent1"/>
+          </a:fillRef>
+          <a:effectRef idx="0">
+            <a:schemeClr val="accent1"/>
+          </a:effectRef>
+          <a:fontRef idx="minor">
+            <a:schemeClr val="lt1"/>
+          </a:fontRef>
+        </p:style>
+        <p:txBody>
+          <a:bodyPr rtlCol="0" anchor="ctr"/>
+          <a:lstStyle/>
+          <a:p>
+            <a:pPr algn="ctr"/>
+            <a:endParaRPr lang="hu-HU"/>
+          </a:p>
+        </p:txBody>
+      </p:sp>
+      <p:sp>
+        <p:nvSpPr>
           <p:cNvPr id="2" name="Cím 1">
             <a:extLst>
               <a:ext uri="{FF2B5EF4-FFF2-40B4-BE49-F238E27FC236}">
@@ -5457,7 +6719,7 @@
         </p:nvSpPr>
         <p:spPr>
           <a:xfrm>
-            <a:off x="838200" y="1825625"/>
+            <a:off x="962487" y="3114614"/>
             <a:ext cx="3028950" cy="1155700"/>
           </a:xfrm>
         </p:spPr>
@@ -5505,7 +6767,7 @@
         </p:nvSpPr>
         <p:spPr>
           <a:xfrm>
-            <a:off x="2152650" y="3987800"/>
+            <a:off x="4581525" y="4112087"/>
             <a:ext cx="3028950" cy="1155700"/>
           </a:xfrm>
           <a:prstGeom prst="rect">
@@ -5723,7 +6985,7 @@
         </p:nvSpPr>
         <p:spPr>
           <a:xfrm>
-            <a:off x="4286250" y="1825625"/>
+            <a:off x="4581525" y="2047567"/>
             <a:ext cx="3028950" cy="1155700"/>
           </a:xfrm>
           <a:prstGeom prst="rect">
@@ -5937,7 +7199,7 @@
         </p:nvSpPr>
         <p:spPr>
           <a:xfrm>
-            <a:off x="7010400" y="3987800"/>
+            <a:off x="8324850" y="3114614"/>
             <a:ext cx="3028950" cy="1155700"/>
           </a:xfrm>
           <a:prstGeom prst="rect">
@@ -6146,9 +7408,18 @@
   <p:clrMapOvr>
     <a:masterClrMapping/>
   </p:clrMapOvr>
-  <p:transition spd="slow">
-    <p:push dir="u"/>
-  </p:transition>
+  <mc:AlternateContent xmlns:mc="http://schemas.openxmlformats.org/markup-compatibility/2006">
+    <mc:Choice xmlns:p14="http://schemas.microsoft.com/office/powerpoint/2010/main" Requires="p14">
+      <p:transition spd="slow" p14:dur="1600">
+        <p14:prism isContent="1" isInverted="1"/>
+      </p:transition>
+    </mc:Choice>
+    <mc:Fallback>
+      <p:transition spd="slow">
+        <p:fade/>
+      </p:transition>
+    </mc:Fallback>
+  </mc:AlternateContent>
 </p:sld>
 </file>
 
@@ -6177,6 +7448,112 @@
       </p:grpSpPr>
       <p:sp>
         <p:nvSpPr>
+          <p:cNvPr id="7" name="Téglalap: lekerekített 6">
+            <a:extLst>
+              <a:ext uri="{FF2B5EF4-FFF2-40B4-BE49-F238E27FC236}">
+                <a16:creationId xmlns:a16="http://schemas.microsoft.com/office/drawing/2014/main" id="{72D69976-623F-6DF0-B8EE-4E2261B74AB0}"/>
+              </a:ext>
+            </a:extLst>
+          </p:cNvPr>
+          <p:cNvSpPr/>
+          <p:nvPr/>
+        </p:nvSpPr>
+        <p:spPr>
+          <a:xfrm>
+            <a:off x="504306" y="241069"/>
+            <a:ext cx="11183388" cy="7109642"/>
+          </a:xfrm>
+          <a:prstGeom prst="roundRect">
+            <a:avLst>
+              <a:gd name="adj" fmla="val 6215"/>
+            </a:avLst>
+          </a:prstGeom>
+          <a:solidFill>
+            <a:srgbClr val="111A2F"/>
+          </a:solidFill>
+          <a:ln>
+            <a:noFill/>
+          </a:ln>
+        </p:spPr>
+        <p:style>
+          <a:lnRef idx="2">
+            <a:schemeClr val="accent1">
+              <a:shade val="15000"/>
+            </a:schemeClr>
+          </a:lnRef>
+          <a:fillRef idx="1">
+            <a:schemeClr val="accent1"/>
+          </a:fillRef>
+          <a:effectRef idx="0">
+            <a:schemeClr val="accent1"/>
+          </a:effectRef>
+          <a:fontRef idx="minor">
+            <a:schemeClr val="lt1"/>
+          </a:fontRef>
+        </p:style>
+        <p:txBody>
+          <a:bodyPr rtlCol="0" anchor="ctr"/>
+          <a:lstStyle/>
+          <a:p>
+            <a:pPr algn="ctr"/>
+            <a:endParaRPr lang="hu-HU"/>
+          </a:p>
+        </p:txBody>
+      </p:sp>
+      <p:sp>
+        <p:nvSpPr>
+          <p:cNvPr id="9" name="Téglalap: lekerekített 8">
+            <a:extLst>
+              <a:ext uri="{FF2B5EF4-FFF2-40B4-BE49-F238E27FC236}">
+                <a16:creationId xmlns:a16="http://schemas.microsoft.com/office/drawing/2014/main" id="{A5FA9F3B-D67F-002A-FA59-DCBD72AA6322}"/>
+              </a:ext>
+            </a:extLst>
+          </p:cNvPr>
+          <p:cNvSpPr/>
+          <p:nvPr/>
+        </p:nvSpPr>
+        <p:spPr>
+          <a:xfrm>
+            <a:off x="838200" y="594804"/>
+            <a:ext cx="8456720" cy="825623"/>
+          </a:xfrm>
+          <a:prstGeom prst="roundRect">
+            <a:avLst/>
+          </a:prstGeom>
+          <a:solidFill>
+            <a:srgbClr val="31275A"/>
+          </a:solidFill>
+          <a:ln>
+            <a:noFill/>
+          </a:ln>
+        </p:spPr>
+        <p:style>
+          <a:lnRef idx="2">
+            <a:schemeClr val="accent1">
+              <a:shade val="15000"/>
+            </a:schemeClr>
+          </a:lnRef>
+          <a:fillRef idx="1">
+            <a:schemeClr val="accent1"/>
+          </a:fillRef>
+          <a:effectRef idx="0">
+            <a:schemeClr val="accent1"/>
+          </a:effectRef>
+          <a:fontRef idx="minor">
+            <a:schemeClr val="lt1"/>
+          </a:fontRef>
+        </p:style>
+        <p:txBody>
+          <a:bodyPr rtlCol="0" anchor="ctr"/>
+          <a:lstStyle/>
+          <a:p>
+            <a:pPr algn="ctr"/>
+            <a:endParaRPr lang="hu-HU"/>
+          </a:p>
+        </p:txBody>
+      </p:sp>
+      <p:sp>
+        <p:nvSpPr>
           <p:cNvPr id="2" name="Cím 1">
             <a:extLst>
               <a:ext uri="{FF2B5EF4-FFF2-40B4-BE49-F238E27FC236}">
@@ -6866,9 +8243,18 @@
   <p:clrMapOvr>
     <a:masterClrMapping/>
   </p:clrMapOvr>
-  <p:transition spd="slow">
-    <p:push dir="u"/>
-  </p:transition>
+  <mc:AlternateContent xmlns:mc="http://schemas.openxmlformats.org/markup-compatibility/2006">
+    <mc:Choice xmlns:p14="http://schemas.microsoft.com/office/powerpoint/2010/main" Requires="p14">
+      <p:transition spd="slow" p14:dur="1600">
+        <p14:prism isContent="1" isInverted="1"/>
+      </p:transition>
+    </mc:Choice>
+    <mc:Fallback>
+      <p:transition spd="slow">
+        <p:fade/>
+      </p:transition>
+    </mc:Fallback>
+  </mc:AlternateContent>
 </p:sld>
 </file>
 
@@ -6897,6 +8283,109 @@
       </p:grpSpPr>
       <p:sp>
         <p:nvSpPr>
+          <p:cNvPr id="7" name="Téglalap: lekerekített 6">
+            <a:extLst>
+              <a:ext uri="{FF2B5EF4-FFF2-40B4-BE49-F238E27FC236}">
+                <a16:creationId xmlns:a16="http://schemas.microsoft.com/office/drawing/2014/main" id="{D3A68F2A-752E-52F9-C937-7FC47013F220}"/>
+              </a:ext>
+            </a:extLst>
+          </p:cNvPr>
+          <p:cNvSpPr/>
+          <p:nvPr/>
+        </p:nvSpPr>
+        <p:spPr>
+          <a:xfrm>
+            <a:off x="504306" y="241069"/>
+            <a:ext cx="11183388" cy="7065253"/>
+          </a:xfrm>
+          <a:prstGeom prst="roundRect">
+            <a:avLst>
+              <a:gd name="adj" fmla="val 6215"/>
+            </a:avLst>
+          </a:prstGeom>
+          <a:solidFill>
+            <a:srgbClr val="111A2F"/>
+          </a:solidFill>
+          <a:ln>
+            <a:noFill/>
+          </a:ln>
+        </p:spPr>
+        <p:style>
+          <a:lnRef idx="2">
+            <a:schemeClr val="accent1">
+              <a:shade val="15000"/>
+            </a:schemeClr>
+          </a:lnRef>
+          <a:fillRef idx="1">
+            <a:schemeClr val="accent1"/>
+          </a:fillRef>
+          <a:effectRef idx="0">
+            <a:schemeClr val="accent1"/>
+          </a:effectRef>
+          <a:fontRef idx="minor">
+            <a:schemeClr val="lt1"/>
+          </a:fontRef>
+        </p:style>
+        <p:txBody>
+          <a:bodyPr rtlCol="0" anchor="ctr"/>
+          <a:lstStyle/>
+          <a:p>
+            <a:pPr algn="ctr"/>
+            <a:endParaRPr lang="hu-HU"/>
+          </a:p>
+        </p:txBody>
+      </p:sp>
+      <p:sp>
+        <p:nvSpPr>
+          <p:cNvPr id="8" name="Téglalap: lekerekített 7">
+            <a:extLst>
+              <a:ext uri="{FF2B5EF4-FFF2-40B4-BE49-F238E27FC236}">
+                <a16:creationId xmlns:a16="http://schemas.microsoft.com/office/drawing/2014/main" id="{FEDE5C3F-EE7A-E9F5-F3DC-ED2C8661A066}"/>
+              </a:ext>
+            </a:extLst>
+          </p:cNvPr>
+          <p:cNvSpPr/>
+          <p:nvPr/>
+        </p:nvSpPr>
+        <p:spPr>
+          <a:xfrm>
+            <a:off x="838200" y="594804"/>
+            <a:ext cx="6432612" cy="825623"/>
+          </a:xfrm>
+          <a:prstGeom prst="roundRect">
+            <a:avLst/>
+          </a:prstGeom>
+          <a:solidFill>
+            <a:srgbClr val="31275A"/>
+          </a:solidFill>
+        </p:spPr>
+        <p:style>
+          <a:lnRef idx="2">
+            <a:schemeClr val="accent1">
+              <a:shade val="15000"/>
+            </a:schemeClr>
+          </a:lnRef>
+          <a:fillRef idx="1">
+            <a:schemeClr val="accent1"/>
+          </a:fillRef>
+          <a:effectRef idx="0">
+            <a:schemeClr val="accent1"/>
+          </a:effectRef>
+          <a:fontRef idx="minor">
+            <a:schemeClr val="lt1"/>
+          </a:fontRef>
+        </p:style>
+        <p:txBody>
+          <a:bodyPr rtlCol="0" anchor="ctr"/>
+          <a:lstStyle/>
+          <a:p>
+            <a:pPr algn="ctr"/>
+            <a:endParaRPr lang="hu-HU"/>
+          </a:p>
+        </p:txBody>
+      </p:sp>
+      <p:sp>
+        <p:nvSpPr>
           <p:cNvPr id="2" name="Cím 1">
             <a:extLst>
               <a:ext uri="{FF2B5EF4-FFF2-40B4-BE49-F238E27FC236}">
@@ -6993,7 +8482,7 @@
             </a:r>
             <a:r>
               <a:rPr lang="hu-HU" dirty="0" err="1"/>
-              <a:t>routing</a:t>
+              <a:t>function</a:t>
             </a:r>
             <a:endParaRPr lang="hu-HU" dirty="0"/>
           </a:p>
@@ -7434,9 +8923,18 @@
   <p:clrMapOvr>
     <a:masterClrMapping/>
   </p:clrMapOvr>
-  <p:transition spd="slow">
-    <p:push dir="u"/>
-  </p:transition>
+  <mc:AlternateContent xmlns:mc="http://schemas.openxmlformats.org/markup-compatibility/2006">
+    <mc:Choice xmlns:p14="http://schemas.microsoft.com/office/powerpoint/2010/main" Requires="p14">
+      <p:transition spd="slow" p14:dur="1600">
+        <p14:prism isContent="1" isInverted="1"/>
+      </p:transition>
+    </mc:Choice>
+    <mc:Fallback>
+      <p:transition spd="slow">
+        <p:fade/>
+      </p:transition>
+    </mc:Fallback>
+  </mc:AlternateContent>
 </p:sld>
 </file>
 
@@ -7459,6 +8957,109 @@
       </p:grpSpPr>
       <p:sp>
         <p:nvSpPr>
+          <p:cNvPr id="4" name="Téglalap: lekerekített 3">
+            <a:extLst>
+              <a:ext uri="{FF2B5EF4-FFF2-40B4-BE49-F238E27FC236}">
+                <a16:creationId xmlns:a16="http://schemas.microsoft.com/office/drawing/2014/main" id="{C803B9DD-2475-AEE2-1558-4F2031E413D2}"/>
+              </a:ext>
+            </a:extLst>
+          </p:cNvPr>
+          <p:cNvSpPr/>
+          <p:nvPr/>
+        </p:nvSpPr>
+        <p:spPr>
+          <a:xfrm>
+            <a:off x="1364202" y="2201661"/>
+            <a:ext cx="9463596" cy="2823099"/>
+          </a:xfrm>
+          <a:prstGeom prst="roundRect">
+            <a:avLst>
+              <a:gd name="adj" fmla="val 10348"/>
+            </a:avLst>
+          </a:prstGeom>
+          <a:solidFill>
+            <a:srgbClr val="111A2F"/>
+          </a:solidFill>
+          <a:ln>
+            <a:noFill/>
+          </a:ln>
+        </p:spPr>
+        <p:style>
+          <a:lnRef idx="2">
+            <a:schemeClr val="accent1">
+              <a:shade val="15000"/>
+            </a:schemeClr>
+          </a:lnRef>
+          <a:fillRef idx="1">
+            <a:schemeClr val="accent1"/>
+          </a:fillRef>
+          <a:effectRef idx="0">
+            <a:schemeClr val="accent1"/>
+          </a:effectRef>
+          <a:fontRef idx="minor">
+            <a:schemeClr val="lt1"/>
+          </a:fontRef>
+        </p:style>
+        <p:txBody>
+          <a:bodyPr rtlCol="0" anchor="ctr"/>
+          <a:lstStyle/>
+          <a:p>
+            <a:pPr algn="ctr"/>
+            <a:endParaRPr lang="hu-HU"/>
+          </a:p>
+        </p:txBody>
+      </p:sp>
+      <p:sp>
+        <p:nvSpPr>
+          <p:cNvPr id="5" name="Téglalap: lekerekített 4">
+            <a:extLst>
+              <a:ext uri="{FF2B5EF4-FFF2-40B4-BE49-F238E27FC236}">
+                <a16:creationId xmlns:a16="http://schemas.microsoft.com/office/drawing/2014/main" id="{6113E110-19E6-3C3E-275D-81FDF9D8E054}"/>
+              </a:ext>
+            </a:extLst>
+          </p:cNvPr>
+          <p:cNvSpPr/>
+          <p:nvPr/>
+        </p:nvSpPr>
+        <p:spPr>
+          <a:xfrm>
+            <a:off x="4524652" y="3509963"/>
+            <a:ext cx="3142696" cy="1212957"/>
+          </a:xfrm>
+          <a:prstGeom prst="roundRect">
+            <a:avLst/>
+          </a:prstGeom>
+          <a:solidFill>
+            <a:srgbClr val="31275A"/>
+          </a:solidFill>
+        </p:spPr>
+        <p:style>
+          <a:lnRef idx="2">
+            <a:schemeClr val="accent1">
+              <a:shade val="15000"/>
+            </a:schemeClr>
+          </a:lnRef>
+          <a:fillRef idx="1">
+            <a:schemeClr val="accent1"/>
+          </a:fillRef>
+          <a:effectRef idx="0">
+            <a:schemeClr val="accent1"/>
+          </a:effectRef>
+          <a:fontRef idx="minor">
+            <a:schemeClr val="lt1"/>
+          </a:fontRef>
+        </p:style>
+        <p:txBody>
+          <a:bodyPr rtlCol="0" anchor="ctr"/>
+          <a:lstStyle/>
+          <a:p>
+            <a:pPr algn="ctr"/>
+            <a:endParaRPr lang="hu-HU"/>
+          </a:p>
+        </p:txBody>
+      </p:sp>
+      <p:sp>
+        <p:nvSpPr>
           <p:cNvPr id="2" name="Cím 1">
             <a:extLst>
               <a:ext uri="{FF2B5EF4-FFF2-40B4-BE49-F238E27FC236}">
@@ -7585,9 +9186,18 @@
   <p:clrMapOvr>
     <a:masterClrMapping/>
   </p:clrMapOvr>
-  <p:transition spd="slow">
-    <p:push dir="u"/>
-  </p:transition>
+  <mc:AlternateContent xmlns:mc="http://schemas.openxmlformats.org/markup-compatibility/2006">
+    <mc:Choice xmlns:p14="http://schemas.microsoft.com/office/powerpoint/2010/main" Requires="p14">
+      <p:transition spd="slow" p14:dur="1600">
+        <p14:prism isContent="1" isInverted="1"/>
+      </p:transition>
+    </mc:Choice>
+    <mc:Fallback>
+      <p:transition spd="slow">
+        <p:fade/>
+      </p:transition>
+    </mc:Fallback>
+  </mc:AlternateContent>
 </p:sld>
 </file>
 
